--- a/docs/slides/pptx/M3-deciding.pptx
+++ b/docs/slides/pptx/M3-deciding.pptx
@@ -22,6 +22,10 @@
     <p:sldId id="270" r:id="rId22"/>
     <p:sldId id="271" r:id="rId23"/>
     <p:sldId id="272" r:id="rId24"/>
+    <p:sldId id="273" r:id="rId25"/>
+    <p:sldId id="274" r:id="rId26"/>
+    <p:sldId id="275" r:id="rId27"/>
+    <p:sldId id="276" r:id="rId28"/>
   </p:sldIdLst>
   <p:sldSz cx="12191695" cy="6858000" type="screen4x3"/>
   <p:notesSz cx="6858000" cy="9144000"/>
@@ -543,6 +547,251 @@
 </p:notes>
 </file>
 
+<file path=ppt/notesSlides/notesSlide10.xml><?xml version="1.0" encoding="utf-8"?>
+<p:notes xmlns:a="http://schemas.openxmlformats.org/drawingml/2006/main" xmlns:p="http://schemas.openxmlformats.org/presentationml/2006/main" xmlns:r="http://schemas.openxmlformats.org/officeDocument/2006/relationships">
+  <p:cSld>
+    <p:spTree>
+      <p:nvGrpSpPr>
+        <p:cNvPr id="1" name=""/>
+        <p:cNvGrpSpPr/>
+        <p:nvPr/>
+      </p:nvGrpSpPr>
+      <p:grpSpPr>
+        <a:xfrm>
+          <a:off x="0" y="0"/>
+          <a:ext cx="0" cy="0"/>
+          <a:chOff x="0" y="0"/>
+          <a:chExt cx="0" cy="0"/>
+        </a:xfrm>
+      </p:grpSpPr>
+      <p:sp>
+        <p:nvSpPr>
+          <p:cNvPr id="2" name="Slide Image Placeholder 1"/>
+          <p:cNvSpPr>
+            <a:spLocks noGrp="1"/>
+          </p:cNvSpPr>
+          <p:nvPr>
+            <p:ph type="sldImg" idx="2"/>
+          </p:nvPr>
+        </p:nvSpPr>
+        <p:spPr/>
+      </p:sp>
+      <p:sp>
+        <p:nvSpPr>
+          <p:cNvPr id="3" name="Notes Placeholder 2"/>
+          <p:cNvSpPr>
+            <a:spLocks noGrp="1"/>
+          </p:cNvSpPr>
+          <p:nvPr>
+            <p:ph type="body" idx="3" sz="quarter"/>
+          </p:nvPr>
+        </p:nvSpPr>
+        <p:spPr/>
+        <p:txBody>
+          <a:bodyPr/>
+          <a:lstStyle/>
+          <a:p>
+            <a:r>
+              <a:t>This is the sharpest slide in the module. Show the raw prompt fail live if time allows; the reference runs are in expected-output.md, 3/3 both ways.</a:t>
+            </a:r>
+          </a:p>
+        </p:txBody>
+      </p:sp>
+      <p:sp>
+        <p:nvSpPr>
+          <p:cNvPr id="4" name="Slide Number Placeholder 3"/>
+          <p:cNvSpPr>
+            <a:spLocks noGrp="1"/>
+          </p:cNvSpPr>
+          <p:nvPr>
+            <p:ph type="sldNum" idx="5" sz="quarter"/>
+          </p:nvPr>
+        </p:nvSpPr>
+        <p:spPr/>
+      </p:sp>
+    </p:spTree>
+  </p:cSld>
+  <p:clrMapOvr>
+    <a:masterClrMapping/>
+  </p:clrMapOvr>
+</p:notes>
+</file>
+
+<file path=ppt/notesSlides/notesSlide11.xml><?xml version="1.0" encoding="utf-8"?>
+<p:notes xmlns:a="http://schemas.openxmlformats.org/drawingml/2006/main" xmlns:p="http://schemas.openxmlformats.org/presentationml/2006/main" xmlns:r="http://schemas.openxmlformats.org/officeDocument/2006/relationships">
+  <p:cSld>
+    <p:spTree>
+      <p:nvGrpSpPr>
+        <p:cNvPr id="1" name=""/>
+        <p:cNvGrpSpPr/>
+        <p:nvPr/>
+      </p:nvGrpSpPr>
+      <p:grpSpPr>
+        <a:xfrm>
+          <a:off x="0" y="0"/>
+          <a:ext cx="0" cy="0"/>
+          <a:chOff x="0" y="0"/>
+          <a:chExt cx="0" cy="0"/>
+        </a:xfrm>
+      </p:grpSpPr>
+      <p:sp>
+        <p:nvSpPr>
+          <p:cNvPr id="2" name="Slide Image Placeholder 1"/>
+          <p:cNvSpPr>
+            <a:spLocks noGrp="1"/>
+          </p:cNvSpPr>
+          <p:nvPr>
+            <p:ph type="sldImg" idx="2"/>
+          </p:nvPr>
+        </p:nvSpPr>
+        <p:spPr/>
+      </p:sp>
+      <p:sp>
+        <p:nvSpPr>
+          <p:cNvPr id="3" name="Notes Placeholder 2"/>
+          <p:cNvSpPr>
+            <a:spLocks noGrp="1"/>
+          </p:cNvSpPr>
+          <p:nvPr>
+            <p:ph type="body" idx="3" sz="quarter"/>
+          </p:nvPr>
+        </p:nvSpPr>
+        <p:spPr/>
+        <p:txBody>
+          <a:bodyPr/>
+          <a:lstStyle/>
+          <a:p>
+            <a:r>
+              <a:t>The emergency row of the policy table skips the whole diagram. That is the design.</a:t>
+            </a:r>
+          </a:p>
+        </p:txBody>
+      </p:sp>
+      <p:sp>
+        <p:nvSpPr>
+          <p:cNvPr id="4" name="Slide Number Placeholder 3"/>
+          <p:cNvSpPr>
+            <a:spLocks noGrp="1"/>
+          </p:cNvSpPr>
+          <p:nvPr>
+            <p:ph type="sldNum" idx="5" sz="quarter"/>
+          </p:nvPr>
+        </p:nvSpPr>
+        <p:spPr/>
+      </p:sp>
+    </p:spTree>
+  </p:cSld>
+  <p:clrMapOvr>
+    <a:masterClrMapping/>
+  </p:clrMapOvr>
+</p:notes>
+</file>
+
+<file path=ppt/notesSlides/notesSlide12.xml><?xml version="1.0" encoding="utf-8"?>
+<p:notes xmlns:a="http://schemas.openxmlformats.org/drawingml/2006/main" xmlns:p="http://schemas.openxmlformats.org/presentationml/2006/main" xmlns:r="http://schemas.openxmlformats.org/officeDocument/2006/relationships">
+  <p:cSld>
+    <p:spTree>
+      <p:nvGrpSpPr>
+        <p:cNvPr id="1" name=""/>
+        <p:cNvGrpSpPr/>
+        <p:nvPr/>
+      </p:nvGrpSpPr>
+      <p:grpSpPr>
+        <a:xfrm>
+          <a:off x="0" y="0"/>
+          <a:ext cx="0" cy="0"/>
+          <a:chOff x="0" y="0"/>
+          <a:chExt cx="0" cy="0"/>
+        </a:xfrm>
+      </p:grpSpPr>
+      <p:sp>
+        <p:nvSpPr>
+          <p:cNvPr id="2" name="Slide Image Placeholder 1"/>
+          <p:cNvSpPr>
+            <a:spLocks noGrp="1"/>
+          </p:cNvSpPr>
+          <p:nvPr>
+            <p:ph type="sldImg" idx="2"/>
+          </p:nvPr>
+        </p:nvSpPr>
+        <p:spPr/>
+      </p:sp>
+      <p:sp>
+        <p:nvSpPr>
+          <p:cNvPr id="3" name="Notes Placeholder 2"/>
+          <p:cNvSpPr>
+            <a:spLocks noGrp="1"/>
+          </p:cNvSpPr>
+          <p:nvPr>
+            <p:ph type="body" idx="3" sz="quarter"/>
+          </p:nvPr>
+        </p:nvSpPr>
+        <p:spPr/>
+        <p:txBody>
+          <a:bodyPr/>
+          <a:lstStyle/>
+          <a:p>
+            <a:r>
+              <a:t>Keep the emergency row on screen for a beat: no AI touches it, and that is a design decision, not a limitation.</a:t>
+            </a:r>
+          </a:p>
+          <a:p>
+            <a:r>
+              <a:t>Demo script (the demo outline that used to live in the spec, sized for the 30-minute block: skip the break-it-on-purpose beats first if you are running long):</a:t>
+            </a:r>
+          </a:p>
+          <a:p>
+            <a:r>
+              <a:t>1. Pick up where feature 07 left off: a routed queue of condition questions awaiting replies.</a:t>
+            </a:r>
+          </a:p>
+          <a:p>
+            <a:r>
+              <a:t>2. Generate a draft reply for one inquiry, grounded in the park docs the same way feature 05 grounded answers. Show the draft on screen; it is good without being perfect.</a:t>
+            </a:r>
+          </a:p>
+          <a:p>
+            <a:r>
+              <a:t>3. Run the approval flow in a small console UI: approve one draft untouched, edit a second before sending, reject a third and write it by hand. Three inquiries handled in the time one used to take.</a:t>
+            </a:r>
+          </a:p>
+          <a:p>
+            <a:r>
+              <a:t>4. Show the audit log the flow just produced: draft, decision, final text, edit distance per reply.</a:t>
+            </a:r>
+          </a:p>
+          <a:p>
+            <a:r>
+              <a:t>5. Put the routing policy on screen as a table: which categories auto-send, which get drafts, which stay human-only. Point at the emergency row: no AI draft, ever, by policy.</a:t>
+            </a:r>
+          </a:p>
+          <a:p>
+            <a:r>
+              <a:t>6. Close the loop: the edits collected in step 3 are tomorrow's prompt improvements. The human is the feedback signal as much as the safety check.</a:t>
+            </a:r>
+          </a:p>
+        </p:txBody>
+      </p:sp>
+      <p:sp>
+        <p:nvSpPr>
+          <p:cNvPr id="4" name="Slide Number Placeholder 3"/>
+          <p:cNvSpPr>
+            <a:spLocks noGrp="1"/>
+          </p:cNvSpPr>
+          <p:nvPr>
+            <p:ph type="sldNum" idx="5" sz="quarter"/>
+          </p:nvPr>
+        </p:nvSpPr>
+        <p:spPr/>
+      </p:sp>
+    </p:spTree>
+  </p:cSld>
+  <p:clrMapOvr>
+    <a:masterClrMapping/>
+  </p:clrMapOvr>
+</p:notes>
+</file>
+
 <file path=ppt/notesSlides/notesSlide2.xml><?xml version="1.0" encoding="utf-8"?>
 <p:notes xmlns:a="http://schemas.openxmlformats.org/drawingml/2006/main" xmlns:p="http://schemas.openxmlformats.org/presentationml/2006/main" xmlns:r="http://schemas.openxmlformats.org/officeDocument/2006/relationships">
   <p:cSld>
@@ -658,42 +907,7 @@
           <a:lstStyle/>
           <a:p>
             <a:r>
-              <a:t>Close on asymmetric cost: what this system is tuned never to miss, and what noise level that tolerance buys.</a:t>
-            </a:r>
-          </a:p>
-          <a:p>
-            <a:r>
-              <a:t>Demo script (the demo outline that used to live in the spec, sized for the 30-minute block: skip the break-it-on-purpose beats first if you are running long):</a:t>
-            </a:r>
-          </a:p>
-          <a:p>
-            <a:r>
-              <a:t>1. Scroll the raw inbox, data/inquiries.jsonl, mixed and unlabeled, and let the room spot the emergency buried in it.</a:t>
-            </a:r>
-          </a:p>
-          <a:p>
-            <a:r>
-              <a:t>2. Starter: one classify method with the taxonomy written as plain-language category descriptions in the prompt, returning exactly one label.</a:t>
-            </a:r>
-          </a:p>
-          <a:p>
-            <a:r>
-              <a:t>3. Run the inbox through it and print each message under its routed queue. The payoff is that the pile becomes a set of tidy queues in seconds, with the emergency at the top of its own.</a:t>
-            </a:r>
-          </a:p>
-          <a:p>
-            <a:r>
-              <a:t>4. Show a misclassification (inq-0030 is planted). Fix it by editing the category description, not the code, and re-run to show the fix landing.</a:t>
-            </a:r>
-          </a:p>
-          <a:p>
-            <a:r>
-              <a:t>5. Walk the "unsure" route in the taxonomy: it is deliberately narrow, for messages that two queues must both act on. Show inq-0035 landing there, which is correct behavior, and point out that the description forbids sending anything dangerous to it.</a:t>
-            </a:r>
-          </a:p>
-          <a:p>
-            <a:r>
-              <a:t>6. Close on asymmetric error costs: what this system is tuned never to miss, and what noise level that tolerance buys.</a:t>
+              <a:t>The module thread is "who decides, and how do you know they got it right." Say which box in each row is the decision.</a:t>
             </a:r>
           </a:p>
         </p:txBody>
@@ -763,7 +977,7 @@
           <a:lstStyle/>
           <a:p>
             <a:r>
-              <a:t>"Most" is doing real work in that sentence, and the demo is honest about it.</a:t>
+              <a:t>The planted misclassification (inq-0030) is fixed by editing the description box. Show that.</a:t>
             </a:r>
           </a:p>
         </p:txBody>
@@ -833,7 +1047,7 @@
           <a:lstStyle/>
           <a:p>
             <a:r>
-              <a:t>Embedding models have usage contracts; reading the model card is engineering work. When 8 of 40 reports describe the same washout they drag the centroid toward themselves; that is why the alert rule beats the ranking, and why the stretch goal builds the centroid from reports before the window. Accuracy here is a property of your corpus, not your code.</a:t>
+              <a:t>Close on asymmetric cost: what this system is tuned never to miss, and what noise level that tolerance buys.</a:t>
             </a:r>
           </a:p>
           <a:p>
@@ -843,32 +1057,32 @@
           </a:p>
           <a:p>
             <a:r>
-              <a:t>1. Scroll the condition-report stream, which is boring on purpose, and ask the room to find the problem. Nobody can, and that is the situation the park is in.</a:t>
-            </a:r>
-          </a:p>
-          <a:p>
-            <a:r>
-              <a:t>2. Embed one trail's reports with the feature 04 embedding code, average the vectors into a centroid, and put the idea on one slide: the center of normal.</a:t>
-            </a:r>
-          </a:p>
-          <a:p>
-            <a:r>
-              <a:t>3. Run it with --raw first and print every report's distance, sorted. It underwhelms, because the washout reports scatter through the middle of the list, and it is worth sitting in that for a second, since this is what the technique actually does out of the box.</a:t>
-            </a:r>
-          </a:p>
-          <a:p>
-            <a:r>
-              <a:t>4. Add the model's task prefix (classification:) and re-run. A washout report jumps to rank 2 and the mud reports settle at the bottom. The lesson: embedding models have usage contracts, and reading the model card is engineering work, not homework.</a:t>
-            </a:r>
-          </a:p>
-          <a:p>
-            <a:r>
-              <a:t>5. Now the alert rule, which is where the feature actually lives: distance beyond threshold, plus two or more flagged reports within a two-week window. One alert fires on this trail, three genuine washout reports in it, nothing false. Show it also catching the bear-activity spike on the other trail, where the signal is even cleaner because that trail's routine chatter is more uniform. Accuracy here is a property of your corpus, not your code.</a:t>
-            </a:r>
-          </a:p>
-          <a:p>
-            <a:r>
-              <a:t>6. Count the model calls: embeddings only, and everything after them was subtraction. Some AI features are mostly arithmetic wearing an AI badge.</a:t>
+              <a:t>1. Scroll the raw inbox, data/inquiries.jsonl, mixed and unlabeled, and let the room spot the emergency buried in it.</a:t>
+            </a:r>
+          </a:p>
+          <a:p>
+            <a:r>
+              <a:t>2. Starter: one classify method with the taxonomy written as plain-language category descriptions in the prompt, returning exactly one label.</a:t>
+            </a:r>
+          </a:p>
+          <a:p>
+            <a:r>
+              <a:t>3. Run the inbox through it and print each message under its routed queue. The payoff is that the pile becomes a set of tidy queues in seconds, with the emergency at the top of its own.</a:t>
+            </a:r>
+          </a:p>
+          <a:p>
+            <a:r>
+              <a:t>4. Show a misclassification (inq-0030 is planted). Fix it by editing the category description, not the code, and re-run to show the fix landing.</a:t>
+            </a:r>
+          </a:p>
+          <a:p>
+            <a:r>
+              <a:t>5. Walk the "unsure" route in the taxonomy: it is deliberately narrow, for messages that two queues must both act on. Show inq-0035 landing there, which is correct behavior, and point out that the description forbids sending anything dangerous to it.</a:t>
+            </a:r>
+          </a:p>
+          <a:p>
+            <a:r>
+              <a:t>6. Close on asymmetric error costs: what this system is tuned never to miss, and what noise level that tolerance buys.</a:t>
             </a:r>
           </a:p>
         </p:txBody>
@@ -938,7 +1152,7 @@
           <a:lstStyle/>
           <a:p>
             <a:r>
-              <a:t>Pairs with 07: classification handles the categories you knew to define; anomaly detection catches the things you didn't.</a:t>
+              <a:t>"Most" is doing real work in that sentence, and the demo is honest about it.</a:t>
             </a:r>
           </a:p>
         </p:txBody>
@@ -1008,7 +1222,7 @@
           <a:lstStyle/>
           <a:p>
             <a:r>
-              <a:t>This is the sharpest slide in the module. Show the raw prompt fail live if time allows; the reference runs are in expected-output.md, 3/3 both ways.</a:t>
+              <a:t>Say "some AI features are mostly arithmetic wearing an AI badge" while pointing at the last three boxes.</a:t>
             </a:r>
           </a:p>
         </p:txBody>
@@ -1078,7 +1292,7 @@
           <a:lstStyle/>
           <a:p>
             <a:r>
-              <a:t>Keep the emergency row on screen for a beat: no AI touches it, and that is a design decision, not a limitation.</a:t>
+              <a:t>Embedding models have usage contracts; reading the model card is engineering work. When 8 of 40 reports describe the same washout they drag the centroid toward themselves; that is why the alert rule beats the ranking, and why the stretch goal builds the centroid from reports before the window. Accuracy here is a property of your corpus, not your code.</a:t>
             </a:r>
           </a:p>
           <a:p>
@@ -1088,32 +1302,102 @@
           </a:p>
           <a:p>
             <a:r>
-              <a:t>1. Pick up where feature 07 left off: a routed queue of condition questions awaiting replies.</a:t>
-            </a:r>
-          </a:p>
-          <a:p>
-            <a:r>
-              <a:t>2. Generate a draft reply for one inquiry, grounded in the park docs the same way feature 05 grounded answers. Show the draft on screen; it is good without being perfect.</a:t>
-            </a:r>
-          </a:p>
-          <a:p>
-            <a:r>
-              <a:t>3. Run the approval flow in a small console UI: approve one draft untouched, edit a second before sending, reject a third and write it by hand. Three inquiries handled in the time one used to take.</a:t>
-            </a:r>
-          </a:p>
-          <a:p>
-            <a:r>
-              <a:t>4. Show the audit log the flow just produced: draft, decision, final text, edit distance per reply.</a:t>
-            </a:r>
-          </a:p>
-          <a:p>
-            <a:r>
-              <a:t>5. Put the routing policy on screen as a table: which categories auto-send, which get drafts, which stay human-only. Point at the emergency row: no AI draft, ever, by policy.</a:t>
-            </a:r>
-          </a:p>
-          <a:p>
-            <a:r>
-              <a:t>6. Close the loop: the edits collected in step 3 are tomorrow's prompt improvements. The human is the feedback signal as much as the safety check.</a:t>
+              <a:t>1. Scroll the condition-report stream, which is boring on purpose, and ask the room to find the problem. Nobody can, and that is the situation the park is in.</a:t>
+            </a:r>
+          </a:p>
+          <a:p>
+            <a:r>
+              <a:t>2. Embed one trail's reports with the feature 04 embedding code, average the vectors into a centroid, and put the idea on one slide: the center of normal.</a:t>
+            </a:r>
+          </a:p>
+          <a:p>
+            <a:r>
+              <a:t>3. Run it with --raw first and print every report's distance, sorted. It underwhelms, because the washout reports scatter through the middle of the list, and it is worth sitting in that for a second, since this is what the technique actually does out of the box.</a:t>
+            </a:r>
+          </a:p>
+          <a:p>
+            <a:r>
+              <a:t>4. Add the model's task prefix (classification:) and re-run. A washout report jumps to rank 2 and the mud reports settle at the bottom. The lesson: embedding models have usage contracts, and reading the model card is engineering work, not homework.</a:t>
+            </a:r>
+          </a:p>
+          <a:p>
+            <a:r>
+              <a:t>5. Now the alert rule, which is where the feature actually lives: distance beyond threshold, plus two or more flagged reports within a two-week window. One alert fires on this trail, three genuine washout reports in it, nothing false. Show it also catching the bear-activity spike on the other trail, where the signal is even cleaner because that trail's routine chatter is more uniform. Accuracy here is a property of your corpus, not your code.</a:t>
+            </a:r>
+          </a:p>
+          <a:p>
+            <a:r>
+              <a:t>6. Count the model calls: embeddings only, and everything after them was subtraction. Some AI features are mostly arithmetic wearing an AI badge.</a:t>
+            </a:r>
+          </a:p>
+        </p:txBody>
+      </p:sp>
+      <p:sp>
+        <p:nvSpPr>
+          <p:cNvPr id="4" name="Slide Number Placeholder 3"/>
+          <p:cNvSpPr>
+            <a:spLocks noGrp="1"/>
+          </p:cNvSpPr>
+          <p:nvPr>
+            <p:ph type="sldNum" idx="5" sz="quarter"/>
+          </p:nvPr>
+        </p:nvSpPr>
+        <p:spPr/>
+      </p:sp>
+    </p:spTree>
+  </p:cSld>
+  <p:clrMapOvr>
+    <a:masterClrMapping/>
+  </p:clrMapOvr>
+</p:notes>
+</file>
+
+<file path=ppt/notesSlides/notesSlide9.xml><?xml version="1.0" encoding="utf-8"?>
+<p:notes xmlns:a="http://schemas.openxmlformats.org/drawingml/2006/main" xmlns:p="http://schemas.openxmlformats.org/presentationml/2006/main" xmlns:r="http://schemas.openxmlformats.org/officeDocument/2006/relationships">
+  <p:cSld>
+    <p:spTree>
+      <p:nvGrpSpPr>
+        <p:cNvPr id="1" name=""/>
+        <p:cNvGrpSpPr/>
+        <p:nvPr/>
+      </p:nvGrpSpPr>
+      <p:grpSpPr>
+        <a:xfrm>
+          <a:off x="0" y="0"/>
+          <a:ext cx="0" cy="0"/>
+          <a:chOff x="0" y="0"/>
+          <a:chExt cx="0" cy="0"/>
+        </a:xfrm>
+      </p:grpSpPr>
+      <p:sp>
+        <p:nvSpPr>
+          <p:cNvPr id="2" name="Slide Image Placeholder 1"/>
+          <p:cNvSpPr>
+            <a:spLocks noGrp="1"/>
+          </p:cNvSpPr>
+          <p:nvPr>
+            <p:ph type="sldImg" idx="2"/>
+          </p:nvPr>
+        </p:nvSpPr>
+        <p:spPr/>
+      </p:sp>
+      <p:sp>
+        <p:nvSpPr>
+          <p:cNvPr id="3" name="Notes Placeholder 2"/>
+          <p:cNvSpPr>
+            <a:spLocks noGrp="1"/>
+          </p:cNvSpPr>
+          <p:nvPr>
+            <p:ph type="body" idx="3" sz="quarter"/>
+          </p:nvPr>
+        </p:nvSpPr>
+        <p:spPr/>
+        <p:txBody>
+          <a:bodyPr/>
+          <a:lstStyle/>
+          <a:p>
+            <a:r>
+              <a:t>Pairs with 07: classification handles the categories you knew to define; anomaly detection catches the things you didn't.</a:t>
             </a:r>
           </a:p>
         </p:txBody>
@@ -4220,7 +4504,7 @@
           <a:lstStyle/>
           <a:p>
             <a:r>
-              <a:t>08 · Leadership Card</a:t>
+              <a:t>08 · The Concept</a:t>
             </a:r>
           </a:p>
         </p:txBody>
@@ -4238,7 +4522,7 @@
         <p:spPr>
           <a:xfrm>
             <a:off x="612648" y="1600200"/>
-            <a:ext cx="10966399" cy="4800600"/>
+            <a:ext cx="10966399" cy="4892040"/>
           </a:xfrm>
         </p:spPr>
         <p:txBody>
@@ -4248,21 +4532,28 @@
             <a:pPr/>
             <a:r>
               <a:rPr sz="2000"/>
-              <a:t>When: any stream of routine text where the rare exception is expensive to miss. Tickets, logs, safety reports, transaction notes, review streams.</a:t>
+              <a:t>Barely an AI feature: embeddings plus arithmetic</a:t>
             </a:r>
           </a:p>
           <a:p>
             <a:pPr/>
             <a:r>
               <a:rPr sz="2000"/>
-              <a:t>Cost: days, and cheap to run forever. Embeddings are the only model cost.</a:t>
+              <a:t>Embed a trail's reports; the routine ones cluster. Average them: a centroid, the center of "normal."</a:t>
             </a:r>
           </a:p>
           <a:p>
             <a:pPr/>
             <a:r>
               <a:rPr sz="2000"/>
-              <a:t>"We hear about the washed-out bridge from the first three reports, not from a one-star review a month later."</a:t>
+              <a:t>A report's distance from the centroid is its anomaly score. "Bridge washed out" sits farther from the mud cluster than mud reports sit from each other.</a:t>
+            </a:r>
+          </a:p>
+          <a:p>
+            <a:pPr/>
+            <a:r>
+              <a:rPr sz="2000"/>
+              <a:t>Cosine distance and a threshold do most of the job</a:t>
             </a:r>
           </a:p>
         </p:txBody>
@@ -4306,7 +4597,7 @@
           <a:lstStyle/>
           <a:p>
             <a:r>
-              <a:t>09 · Human-in-the-Loop: The User Problem</a:t>
+              <a:t>08 · How It Works</a:t>
             </a:r>
           </a:p>
         </p:txBody>
@@ -4323,8 +4614,8 @@
         </p:nvSpPr>
         <p:spPr>
           <a:xfrm>
-            <a:off x="612648" y="1600200"/>
-            <a:ext cx="10966399" cy="4800600"/>
+            <a:off x="612648" y="3099816"/>
+            <a:ext cx="10966399" cy="3392424"/>
           </a:xfrm>
         </p:spPr>
         <p:txBody>
@@ -4333,29 +4624,554 @@
           <a:p>
             <a:pPr/>
             <a:r>
-              <a:rPr sz="2000"/>
-              <a:t>07 routed the inbox; now the ranger has forty messages that need replies. Most are boilerplate typed a hundred times.</a:t>
+              <a:rPr sz="1600"/>
+              <a:t>The model is only used to turn reports into vectors. Every box after that is subtraction and a rule.</a:t>
             </a:r>
           </a:p>
           <a:p>
             <a:pPr/>
             <a:r>
-              <a:rPr sz="2000"/>
-              <a:t>The obvious move: let the AI answer</a:t>
+              <a:rPr sz="1600"/>
+              <a:t>The alert rule is where the feature lives: one odd report is noise, two in a fortnight is a washout</a:t>
             </a:r>
           </a:p>
           <a:p>
             <a:pPr/>
             <a:r>
-              <a:rPr sz="2000"/>
-              <a:t>The obvious disaster: the AI tells a visitor campfires are fine during a burn ban, on official letterhead</a:t>
-            </a:r>
-          </a:p>
-          <a:p>
-            <a:pPr/>
-            <a:r>
-              <a:rPr sz="2000"/>
-              <a:t>The ranger's problem is drudgery. The park's problem is that fully automating outbound communication is how you end up apologizing publicly.</a:t>
+              <a:rPr sz="1600"/>
+              <a:t>Reusing 04's embedding code; the task prefix is the one thing that changed the ranking</a:t>
+            </a:r>
+          </a:p>
+        </p:txBody>
+      </p:sp>
+      <p:sp>
+        <p:nvSpPr>
+          <p:cNvPr id="4" name="Rounded Rectangle 3"/>
+          <p:cNvSpPr/>
+          <p:nvPr/>
+        </p:nvSpPr>
+        <p:spPr>
+          <a:xfrm>
+            <a:off x="612648" y="1554480"/>
+            <a:ext cx="1484833" cy="1271016"/>
+          </a:xfrm>
+          <a:prstGeom prst="roundRect">
+            <a:avLst/>
+          </a:prstGeom>
+          <a:noFill/>
+          <a:ln w="19050">
+            <a:solidFill>
+              <a:srgbClr val="000000"/>
+            </a:solidFill>
+          </a:ln>
+          <a:effectLst/>
+        </p:spPr>
+        <p:style>
+          <a:lnRef idx="1">
+            <a:schemeClr val="accent1"/>
+          </a:lnRef>
+          <a:fillRef idx="3">
+            <a:schemeClr val="accent1"/>
+          </a:fillRef>
+          <a:effectRef idx="2">
+            <a:schemeClr val="accent1"/>
+          </a:effectRef>
+          <a:fontRef idx="minor">
+            <a:schemeClr val="lt1"/>
+          </a:fontRef>
+        </p:style>
+        <p:txBody>
+          <a:bodyPr rtlCol="0" anchor="ctr" wrap="square" lIns="73152" rIns="73152"/>
+          <a:lstStyle/>
+          <a:p>
+            <a:pPr algn="ctr"/>
+            <a:r>
+              <a:rPr sz="1300">
+                <a:solidFill>
+                  <a:srgbClr val="000000"/>
+                </a:solidFill>
+              </a:rPr>
+              <a:t>A trail's condition reports</a:t>
+            </a:r>
+          </a:p>
+        </p:txBody>
+      </p:sp>
+      <p:sp>
+        <p:nvSpPr>
+          <p:cNvPr id="5" name="Right Arrow 4"/>
+          <p:cNvSpPr/>
+          <p:nvPr/>
+        </p:nvSpPr>
+        <p:spPr>
+          <a:xfrm>
+            <a:off x="2152345" y="2043684"/>
+            <a:ext cx="301752" cy="292608"/>
+          </a:xfrm>
+          <a:prstGeom prst="rightArrow">
+            <a:avLst/>
+          </a:prstGeom>
+          <a:solidFill>
+            <a:srgbClr val="000000"/>
+          </a:solidFill>
+          <a:ln>
+            <a:noFill/>
+          </a:ln>
+          <a:effectLst/>
+        </p:spPr>
+        <p:style>
+          <a:lnRef idx="1">
+            <a:schemeClr val="accent1"/>
+          </a:lnRef>
+          <a:fillRef idx="3">
+            <a:schemeClr val="accent1"/>
+          </a:fillRef>
+          <a:effectRef idx="2">
+            <a:schemeClr val="accent1"/>
+          </a:effectRef>
+          <a:fontRef idx="minor">
+            <a:schemeClr val="lt1"/>
+          </a:fontRef>
+        </p:style>
+        <p:txBody>
+          <a:bodyPr rtlCol="0" anchor="ctr"/>
+          <a:lstStyle/>
+          <a:p>
+            <a:pPr algn="ctr"/>
+          </a:p>
+        </p:txBody>
+      </p:sp>
+      <p:sp>
+        <p:nvSpPr>
+          <p:cNvPr id="6" name="Rounded Rectangle 5"/>
+          <p:cNvSpPr/>
+          <p:nvPr/>
+        </p:nvSpPr>
+        <p:spPr>
+          <a:xfrm>
+            <a:off x="2508961" y="1554480"/>
+            <a:ext cx="1484833" cy="1271016"/>
+          </a:xfrm>
+          <a:prstGeom prst="roundRect">
+            <a:avLst/>
+          </a:prstGeom>
+          <a:noFill/>
+          <a:ln w="19050">
+            <a:solidFill>
+              <a:srgbClr val="000000"/>
+            </a:solidFill>
+          </a:ln>
+          <a:effectLst/>
+        </p:spPr>
+        <p:style>
+          <a:lnRef idx="1">
+            <a:schemeClr val="accent1"/>
+          </a:lnRef>
+          <a:fillRef idx="3">
+            <a:schemeClr val="accent1"/>
+          </a:fillRef>
+          <a:effectRef idx="2">
+            <a:schemeClr val="accent1"/>
+          </a:effectRef>
+          <a:fontRef idx="minor">
+            <a:schemeClr val="lt1"/>
+          </a:fontRef>
+        </p:style>
+        <p:txBody>
+          <a:bodyPr rtlCol="0" anchor="ctr" wrap="square" lIns="73152" rIns="73152"/>
+          <a:lstStyle/>
+          <a:p>
+            <a:pPr algn="ctr"/>
+            <a:r>
+              <a:rPr sz="1300">
+                <a:solidFill>
+                  <a:srgbClr val="000000"/>
+                </a:solidFill>
+              </a:rPr>
+              <a:t>nomic-embed-text, with the classification: prefix</a:t>
+            </a:r>
+          </a:p>
+        </p:txBody>
+      </p:sp>
+      <p:sp>
+        <p:nvSpPr>
+          <p:cNvPr id="7" name="Right Arrow 6"/>
+          <p:cNvSpPr/>
+          <p:nvPr/>
+        </p:nvSpPr>
+        <p:spPr>
+          <a:xfrm>
+            <a:off x="4048658" y="2043684"/>
+            <a:ext cx="301752" cy="292608"/>
+          </a:xfrm>
+          <a:prstGeom prst="rightArrow">
+            <a:avLst/>
+          </a:prstGeom>
+          <a:solidFill>
+            <a:srgbClr val="000000"/>
+          </a:solidFill>
+          <a:ln>
+            <a:noFill/>
+          </a:ln>
+          <a:effectLst/>
+        </p:spPr>
+        <p:style>
+          <a:lnRef idx="1">
+            <a:schemeClr val="accent1"/>
+          </a:lnRef>
+          <a:fillRef idx="3">
+            <a:schemeClr val="accent1"/>
+          </a:fillRef>
+          <a:effectRef idx="2">
+            <a:schemeClr val="accent1"/>
+          </a:effectRef>
+          <a:fontRef idx="minor">
+            <a:schemeClr val="lt1"/>
+          </a:fontRef>
+        </p:style>
+        <p:txBody>
+          <a:bodyPr rtlCol="0" anchor="ctr"/>
+          <a:lstStyle/>
+          <a:p>
+            <a:pPr algn="ctr"/>
+          </a:p>
+        </p:txBody>
+      </p:sp>
+      <p:sp>
+        <p:nvSpPr>
+          <p:cNvPr id="8" name="Rounded Rectangle 7"/>
+          <p:cNvSpPr/>
+          <p:nvPr/>
+        </p:nvSpPr>
+        <p:spPr>
+          <a:xfrm>
+            <a:off x="4405274" y="1554480"/>
+            <a:ext cx="1484833" cy="1271016"/>
+          </a:xfrm>
+          <a:prstGeom prst="roundRect">
+            <a:avLst/>
+          </a:prstGeom>
+          <a:noFill/>
+          <a:ln w="19050">
+            <a:solidFill>
+              <a:srgbClr val="000000"/>
+            </a:solidFill>
+          </a:ln>
+          <a:effectLst/>
+        </p:spPr>
+        <p:style>
+          <a:lnRef idx="1">
+            <a:schemeClr val="accent1"/>
+          </a:lnRef>
+          <a:fillRef idx="3">
+            <a:schemeClr val="accent1"/>
+          </a:fillRef>
+          <a:effectRef idx="2">
+            <a:schemeClr val="accent1"/>
+          </a:effectRef>
+          <a:fontRef idx="minor">
+            <a:schemeClr val="lt1"/>
+          </a:fontRef>
+        </p:style>
+        <p:txBody>
+          <a:bodyPr rtlCol="0" anchor="ctr" wrap="square" lIns="73152" rIns="73152"/>
+          <a:lstStyle/>
+          <a:p>
+            <a:pPr algn="ctr"/>
+            <a:r>
+              <a:rPr sz="1300">
+                <a:solidFill>
+                  <a:srgbClr val="000000"/>
+                </a:solidFill>
+              </a:rPr>
+              <a:t>Average the vectors: the centroid of "normal"</a:t>
+            </a:r>
+          </a:p>
+        </p:txBody>
+      </p:sp>
+      <p:sp>
+        <p:nvSpPr>
+          <p:cNvPr id="9" name="Right Arrow 8"/>
+          <p:cNvSpPr/>
+          <p:nvPr/>
+        </p:nvSpPr>
+        <p:spPr>
+          <a:xfrm>
+            <a:off x="5944971" y="2043684"/>
+            <a:ext cx="301752" cy="292608"/>
+          </a:xfrm>
+          <a:prstGeom prst="rightArrow">
+            <a:avLst/>
+          </a:prstGeom>
+          <a:solidFill>
+            <a:srgbClr val="000000"/>
+          </a:solidFill>
+          <a:ln>
+            <a:noFill/>
+          </a:ln>
+          <a:effectLst/>
+        </p:spPr>
+        <p:style>
+          <a:lnRef idx="1">
+            <a:schemeClr val="accent1"/>
+          </a:lnRef>
+          <a:fillRef idx="3">
+            <a:schemeClr val="accent1"/>
+          </a:fillRef>
+          <a:effectRef idx="2">
+            <a:schemeClr val="accent1"/>
+          </a:effectRef>
+          <a:fontRef idx="minor">
+            <a:schemeClr val="lt1"/>
+          </a:fontRef>
+        </p:style>
+        <p:txBody>
+          <a:bodyPr rtlCol="0" anchor="ctr"/>
+          <a:lstStyle/>
+          <a:p>
+            <a:pPr algn="ctr"/>
+          </a:p>
+        </p:txBody>
+      </p:sp>
+      <p:sp>
+        <p:nvSpPr>
+          <p:cNvPr id="10" name="Rounded Rectangle 9"/>
+          <p:cNvSpPr/>
+          <p:nvPr/>
+        </p:nvSpPr>
+        <p:spPr>
+          <a:xfrm>
+            <a:off x="6301587" y="1554480"/>
+            <a:ext cx="1484833" cy="1271016"/>
+          </a:xfrm>
+          <a:prstGeom prst="roundRect">
+            <a:avLst/>
+          </a:prstGeom>
+          <a:noFill/>
+          <a:ln w="19050">
+            <a:solidFill>
+              <a:srgbClr val="000000"/>
+            </a:solidFill>
+          </a:ln>
+          <a:effectLst/>
+        </p:spPr>
+        <p:style>
+          <a:lnRef idx="1">
+            <a:schemeClr val="accent1"/>
+          </a:lnRef>
+          <a:fillRef idx="3">
+            <a:schemeClr val="accent1"/>
+          </a:fillRef>
+          <a:effectRef idx="2">
+            <a:schemeClr val="accent1"/>
+          </a:effectRef>
+          <a:fontRef idx="minor">
+            <a:schemeClr val="lt1"/>
+          </a:fontRef>
+        </p:style>
+        <p:txBody>
+          <a:bodyPr rtlCol="0" anchor="ctr" wrap="square" lIns="73152" rIns="73152"/>
+          <a:lstStyle/>
+          <a:p>
+            <a:pPr algn="ctr"/>
+            <a:r>
+              <a:rPr sz="1300">
+                <a:solidFill>
+                  <a:srgbClr val="000000"/>
+                </a:solidFill>
+              </a:rPr>
+              <a:t>Distance of each new report from it</a:t>
+            </a:r>
+          </a:p>
+        </p:txBody>
+      </p:sp>
+      <p:sp>
+        <p:nvSpPr>
+          <p:cNvPr id="11" name="Right Arrow 10"/>
+          <p:cNvSpPr/>
+          <p:nvPr/>
+        </p:nvSpPr>
+        <p:spPr>
+          <a:xfrm>
+            <a:off x="7841284" y="2043684"/>
+            <a:ext cx="301752" cy="292608"/>
+          </a:xfrm>
+          <a:prstGeom prst="rightArrow">
+            <a:avLst/>
+          </a:prstGeom>
+          <a:solidFill>
+            <a:srgbClr val="000000"/>
+          </a:solidFill>
+          <a:ln>
+            <a:noFill/>
+          </a:ln>
+          <a:effectLst/>
+        </p:spPr>
+        <p:style>
+          <a:lnRef idx="1">
+            <a:schemeClr val="accent1"/>
+          </a:lnRef>
+          <a:fillRef idx="3">
+            <a:schemeClr val="accent1"/>
+          </a:fillRef>
+          <a:effectRef idx="2">
+            <a:schemeClr val="accent1"/>
+          </a:effectRef>
+          <a:fontRef idx="minor">
+            <a:schemeClr val="lt1"/>
+          </a:fontRef>
+        </p:style>
+        <p:txBody>
+          <a:bodyPr rtlCol="0" anchor="ctr"/>
+          <a:lstStyle/>
+          <a:p>
+            <a:pPr algn="ctr"/>
+          </a:p>
+        </p:txBody>
+      </p:sp>
+      <p:sp>
+        <p:nvSpPr>
+          <p:cNvPr id="12" name="Rounded Rectangle 11"/>
+          <p:cNvSpPr/>
+          <p:nvPr/>
+        </p:nvSpPr>
+        <p:spPr>
+          <a:xfrm>
+            <a:off x="8197900" y="1554480"/>
+            <a:ext cx="1484833" cy="1271016"/>
+          </a:xfrm>
+          <a:prstGeom prst="roundRect">
+            <a:avLst/>
+          </a:prstGeom>
+          <a:noFill/>
+          <a:ln w="19050">
+            <a:solidFill>
+              <a:srgbClr val="000000"/>
+            </a:solidFill>
+          </a:ln>
+          <a:effectLst/>
+        </p:spPr>
+        <p:style>
+          <a:lnRef idx="1">
+            <a:schemeClr val="accent1"/>
+          </a:lnRef>
+          <a:fillRef idx="3">
+            <a:schemeClr val="accent1"/>
+          </a:fillRef>
+          <a:effectRef idx="2">
+            <a:schemeClr val="accent1"/>
+          </a:effectRef>
+          <a:fontRef idx="minor">
+            <a:schemeClr val="lt1"/>
+          </a:fontRef>
+        </p:style>
+        <p:txBody>
+          <a:bodyPr rtlCol="0" anchor="ctr" wrap="square" lIns="73152" rIns="73152"/>
+          <a:lstStyle/>
+          <a:p>
+            <a:pPr algn="ctr"/>
+            <a:r>
+              <a:rPr sz="1300">
+                <a:solidFill>
+                  <a:srgbClr val="000000"/>
+                </a:solidFill>
+              </a:rPr>
+              <a:t>Beyond threshold, and 2 or more in 14 days</a:t>
+            </a:r>
+          </a:p>
+        </p:txBody>
+      </p:sp>
+      <p:sp>
+        <p:nvSpPr>
+          <p:cNvPr id="13" name="Right Arrow 12"/>
+          <p:cNvSpPr/>
+          <p:nvPr/>
+        </p:nvSpPr>
+        <p:spPr>
+          <a:xfrm>
+            <a:off x="9737597" y="2043684"/>
+            <a:ext cx="301752" cy="292608"/>
+          </a:xfrm>
+          <a:prstGeom prst="rightArrow">
+            <a:avLst/>
+          </a:prstGeom>
+          <a:solidFill>
+            <a:srgbClr val="000000"/>
+          </a:solidFill>
+          <a:ln>
+            <a:noFill/>
+          </a:ln>
+          <a:effectLst/>
+        </p:spPr>
+        <p:style>
+          <a:lnRef idx="1">
+            <a:schemeClr val="accent1"/>
+          </a:lnRef>
+          <a:fillRef idx="3">
+            <a:schemeClr val="accent1"/>
+          </a:fillRef>
+          <a:effectRef idx="2">
+            <a:schemeClr val="accent1"/>
+          </a:effectRef>
+          <a:fontRef idx="minor">
+            <a:schemeClr val="lt1"/>
+          </a:fontRef>
+        </p:style>
+        <p:txBody>
+          <a:bodyPr rtlCol="0" anchor="ctr"/>
+          <a:lstStyle/>
+          <a:p>
+            <a:pPr algn="ctr"/>
+          </a:p>
+        </p:txBody>
+      </p:sp>
+      <p:sp>
+        <p:nvSpPr>
+          <p:cNvPr id="14" name="Rounded Rectangle 13"/>
+          <p:cNvSpPr/>
+          <p:nvPr/>
+        </p:nvSpPr>
+        <p:spPr>
+          <a:xfrm>
+            <a:off x="10094213" y="1554480"/>
+            <a:ext cx="1484833" cy="1271016"/>
+          </a:xfrm>
+          <a:prstGeom prst="roundRect">
+            <a:avLst/>
+          </a:prstGeom>
+          <a:noFill/>
+          <a:ln w="19050">
+            <a:solidFill>
+              <a:srgbClr val="000000"/>
+            </a:solidFill>
+          </a:ln>
+          <a:effectLst/>
+        </p:spPr>
+        <p:style>
+          <a:lnRef idx="1">
+            <a:schemeClr val="accent1"/>
+          </a:lnRef>
+          <a:fillRef idx="3">
+            <a:schemeClr val="accent1"/>
+          </a:fillRef>
+          <a:effectRef idx="2">
+            <a:schemeClr val="accent1"/>
+          </a:effectRef>
+          <a:fontRef idx="minor">
+            <a:schemeClr val="lt1"/>
+          </a:fontRef>
+        </p:style>
+        <p:txBody>
+          <a:bodyPr rtlCol="0" anchor="ctr" wrap="square" lIns="73152" rIns="73152"/>
+          <a:lstStyle/>
+          <a:p>
+            <a:pPr algn="ctr"/>
+            <a:r>
+              <a:rPr sz="1300">
+                <a:solidFill>
+                  <a:srgbClr val="000000"/>
+                </a:solidFill>
+              </a:rPr>
+              <a:t>Alert</a:t>
             </a:r>
           </a:p>
         </p:txBody>
@@ -4399,7 +5215,7 @@
           <a:lstStyle/>
           <a:p>
             <a:r>
-              <a:t>09 · The Concept</a:t>
+              <a:t>08 · Demo: What to Watch</a:t>
             </a:r>
           </a:p>
         </p:txBody>
@@ -4417,7 +5233,7 @@
         <p:spPr>
           <a:xfrm>
             <a:off x="612648" y="1600200"/>
-            <a:ext cx="10966399" cy="4800600"/>
+            <a:ext cx="10966399" cy="4892040"/>
           </a:xfrm>
         </p:spPr>
         <p:txBody>
@@ -4427,35 +5243,49 @@
             <a:pPr/>
             <a:r>
               <a:rPr sz="2000"/>
-              <a:t>A product pattern, not a model feature. The difference between AI features that ship and ones killed in legal review.</a:t>
+              <a:t>Scroll the report stream, which is boring on purpose. Nobody can find the problem.</a:t>
             </a:r>
           </a:p>
           <a:p>
             <a:pPr/>
             <a:r>
               <a:rPr sz="2000"/>
-              <a:t>AI drafts; a human approves, edits, or rejects; the system remembers what happened</a:t>
+              <a:t>Centroid on one slide: the center of normal</a:t>
             </a:r>
           </a:p>
           <a:p>
             <a:pPr/>
             <a:r>
               <a:rPr sz="2000"/>
-              <a:t>Three lanes by error cost and reversibility: auto-send · draft-for-approval · human-only</a:t>
+              <a:t>--raw first: the washout reports scatter through the middle of the list. Let that sit for a second.</a:t>
             </a:r>
           </a:p>
           <a:p>
             <a:pPr/>
             <a:r>
               <a:rPr sz="2000"/>
-              <a:t>Emergencies never get an AI draft at all</a:t>
+              <a:t>Add the model's task prefix (classification:): a washout report jumps from rank 11 to rank 2, and the mud reports settle to the bottom</a:t>
             </a:r>
           </a:p>
           <a:p>
             <a:pPr/>
             <a:r>
               <a:rPr sz="2000"/>
-              <a:t>Audit trail, and measure the draft-to-final gap: how much people edit tells you whether trust in each lane is earned</a:t>
+              <a:t>The alert rule: distance beyond threshold, plus two flagged reports within 14 days. One alert fires, with three genuine washout reports in it and no false positives.</a:t>
+            </a:r>
+          </a:p>
+          <a:p>
+            <a:pPr/>
+            <a:r>
+              <a:rPr sz="2000"/>
+              <a:t>Second trail: the bear spike, cleaner because that trail's routine chatter is more uniform</a:t>
+            </a:r>
+          </a:p>
+          <a:p>
+            <a:pPr/>
+            <a:r>
+              <a:rPr sz="2000"/>
+              <a:t>Count the model calls: embeddings only. Everything else was subtraction.</a:t>
             </a:r>
           </a:p>
         </p:txBody>
@@ -4499,7 +5329,7 @@
           <a:lstStyle/>
           <a:p>
             <a:r>
-              <a:t>09 · The Failure That Makes the Point</a:t>
+              <a:t>08 · Leadership Card</a:t>
             </a:r>
           </a:p>
         </p:txBody>
@@ -4517,7 +5347,7 @@
         <p:spPr>
           <a:xfrm>
             <a:off x="612648" y="1600200"/>
-            <a:ext cx="10966399" cy="4800600"/>
+            <a:ext cx="10966399" cy="4892040"/>
           </a:xfrm>
         </p:spPr>
         <p:txBody>
@@ -4527,28 +5357,21 @@
             <a:pPr/>
             <a:r>
               <a:rPr sz="2000"/>
-              <a:t>Asked to draft a reply to a woman whose husband is four hours overdue, the model ignores its escalation instruction and writes a warm, reassuring, useless note. Every run.</a:t>
+              <a:t>When: any stream of routine text where the rare exception is expensive to miss. Tickets, logs, safety reports, transaction notes, review streams.</a:t>
             </a:r>
           </a:p>
           <a:p>
             <a:pPr/>
             <a:r>
               <a:rPr sz="2000"/>
-              <a:t>Move the instruction to the top: it announces ESCALATE, then writes the note anyway. Every run.</a:t>
+              <a:t>Cost: days, and cheap to run forever. Embeddings are the only model cost.</a:t>
             </a:r>
           </a:p>
           <a:p>
             <a:pPr/>
             <a:r>
               <a:rPr sz="2000"/>
-              <a:t>More prompt engineering is not the lesson</a:t>
-            </a:r>
-          </a:p>
-          <a:p>
-            <a:pPr/>
-            <a:r>
-              <a:rPr sz="2000"/>
-              <a:t>The finished demo refuses to send emergencies to the model at all. The policy lives in code instead of in the prompt.</a:t>
+              <a:t>"We hear about the washed-out bridge from the first three reports, not from a one-star review a month later."</a:t>
             </a:r>
           </a:p>
         </p:txBody>
@@ -4592,7 +5415,7 @@
           <a:lstStyle/>
           <a:p>
             <a:r>
-              <a:t>09 · Demo: What to Watch</a:t>
+              <a:t>09 · Human-in-the-Loop: The User Problem</a:t>
             </a:r>
           </a:p>
         </p:txBody>
@@ -4610,7 +5433,7 @@
         <p:spPr>
           <a:xfrm>
             <a:off x="612648" y="1600200"/>
-            <a:ext cx="10966399" cy="4800600"/>
+            <a:ext cx="10966399" cy="4892040"/>
           </a:xfrm>
         </p:spPr>
         <p:txBody>
@@ -4620,42 +5443,28 @@
             <a:pPr/>
             <a:r>
               <a:rPr sz="2000"/>
-              <a:t>A routed queue of condition questions awaiting replies</a:t>
+              <a:t>07 routed the inbox; now the ranger has forty messages that need replies. Most are boilerplate typed a hundred times.</a:t>
             </a:r>
           </a:p>
           <a:p>
             <a:pPr/>
             <a:r>
               <a:rPr sz="2000"/>
-              <a:t>Draft one reply, grounded in park docs the way 05 grounded answers. It is good without being perfect.</a:t>
+              <a:t>The obvious move: let the AI answer</a:t>
             </a:r>
           </a:p>
           <a:p>
             <a:pPr/>
             <a:r>
               <a:rPr sz="2000"/>
-              <a:t>Approve one untouched, edit a second, reject a third and write it by hand</a:t>
+              <a:t>The obvious disaster: the AI tells a visitor campfires are fine during a burn ban, on official letterhead</a:t>
             </a:r>
           </a:p>
           <a:p>
             <a:pPr/>
             <a:r>
               <a:rPr sz="2000"/>
-              <a:t>The audit log: draft, decision, final text, edit distance per reply</a:t>
-            </a:r>
-          </a:p>
-          <a:p>
-            <a:pPr/>
-            <a:r>
-              <a:rPr sz="2000"/>
-              <a:t>The policy table on screen; point at the emergency row</a:t>
-            </a:r>
-          </a:p>
-          <a:p>
-            <a:pPr/>
-            <a:r>
-              <a:rPr sz="2000"/>
-              <a:t>The edits from step 3 are tomorrow's prompt improvements. The human is the feedback signal as much as the safety check.</a:t>
+              <a:t>The ranger's problem is drudgery. The park's problem is that fully automating outbound communication is how you end up apologizing publicly.</a:t>
             </a:r>
           </a:p>
         </p:txBody>
@@ -4699,7 +5508,7 @@
           <a:lstStyle/>
           <a:p>
             <a:r>
-              <a:t>09 · Leadership Card</a:t>
+              <a:t>09 · The Concept</a:t>
             </a:r>
           </a:p>
         </p:txBody>
@@ -4717,7 +5526,7 @@
         <p:spPr>
           <a:xfrm>
             <a:off x="612648" y="1600200"/>
-            <a:ext cx="10966399" cy="4800600"/>
+            <a:ext cx="10966399" cy="4892040"/>
           </a:xfrm>
         </p:spPr>
         <p:txBody>
@@ -4727,21 +5536,35 @@
             <a:pPr/>
             <a:r>
               <a:rPr sz="2000"/>
-              <a:t>When: any customer-facing or high-stakes generation. Support replies, quotes, claims decisions, anything sent under your name.</a:t>
+              <a:t>A product pattern, not a model feature. The difference between AI features that ship and ones killed in legal review.</a:t>
             </a:r>
           </a:p>
           <a:p>
             <a:pPr/>
             <a:r>
               <a:rPr sz="2000"/>
-              <a:t>Cost: drafting is trivial; the approval UI, audit trail, and policy design are ordinary product engineering, measured in weeks. Often what makes the other nine shippable.</a:t>
+              <a:t>AI drafts; a human approves, edits, or rejects; the system remembers what happened</a:t>
             </a:r>
           </a:p>
           <a:p>
             <a:pPr/>
             <a:r>
               <a:rPr sz="2000"/>
-              <a:t>"The AI does the typing, our people keep the judgment, and nothing goes out without a human OK until the data says it can."</a:t>
+              <a:t>Three lanes by error cost and reversibility: auto-send · draft-for-approval · human-only</a:t>
+            </a:r>
+          </a:p>
+          <a:p>
+            <a:pPr/>
+            <a:r>
+              <a:rPr sz="2000"/>
+              <a:t>Emergencies never get an AI draft at all</a:t>
+            </a:r>
+          </a:p>
+          <a:p>
+            <a:pPr/>
+            <a:r>
+              <a:rPr sz="2000"/>
+              <a:t>Audit trail, and measure the draft-to-final gap: how much people edit tells you whether trust in each lane is earned</a:t>
             </a:r>
           </a:p>
         </p:txBody>
@@ -4785,7 +5608,7 @@
           <a:lstStyle/>
           <a:p>
             <a:r>
-              <a:t>Hands-On: 60 Minutes</a:t>
+              <a:t>09 · The Failure That Makes the Point</a:t>
             </a:r>
           </a:p>
         </p:txBody>
@@ -4803,7 +5626,7 @@
         <p:spPr>
           <a:xfrm>
             <a:off x="612648" y="1600200"/>
-            <a:ext cx="10966399" cy="4800600"/>
+            <a:ext cx="10966399" cy="4892040"/>
           </a:xfrm>
         </p:spPr>
         <p:txBody>
@@ -4813,28 +5636,28 @@
             <a:pPr/>
             <a:r>
               <a:rPr sz="2000"/>
-              <a:t>Start with 07 Classification (Recommended): structured output with an enum plus an honest scoring pass. The number that matters is whether both emergencies were caught. Missing one fails the lab at 19/20.</a:t>
+              <a:t>Asked to draft a reply to a woman whose husband is four hours overdue, the model ignores its escalation instruction and writes a warm, reassuring, useless note. Every run.</a:t>
             </a:r>
           </a:p>
           <a:p>
             <a:pPr/>
             <a:r>
               <a:rPr sz="2000"/>
-              <a:t>Then choose by energy as much as by interest:</a:t>
-            </a:r>
-          </a:p>
-          <a:p>
-            <a:pPr lvl="1"/>
-            <a:r>
-              <a:rPr sz="1800"/>
-              <a:t>08 Anomaly Detection: the most code. Ships precomputed vectors so you can go straight to the math.</a:t>
-            </a:r>
-          </a:p>
-          <a:p>
-            <a:pPr lvl="1"/>
-            <a:r>
-              <a:rPr sz="1800"/>
-              <a:t>09 Human-in-the-Loop: the least code; mostly a policy worksheet and a decision about what your software may do unsupervised. Running out of gas? Take this. It is also the one most likely to matter back at work.</a:t>
+              <a:t>Move the instruction to the top: it announces ESCALATE, then writes the note anyway. Every run.</a:t>
+            </a:r>
+          </a:p>
+          <a:p>
+            <a:pPr/>
+            <a:r>
+              <a:rPr sz="2000"/>
+              <a:t>More prompt engineering is not the lesson</a:t>
+            </a:r>
+          </a:p>
+          <a:p>
+            <a:pPr/>
+            <a:r>
+              <a:rPr sz="2000"/>
+              <a:t>The finished demo refuses to send emergencies to the model at all. The policy lives in code instead of in the prompt.</a:t>
             </a:r>
           </a:p>
         </p:txBody>
@@ -4878,7 +5701,7 @@
           <a:lstStyle/>
           <a:p>
             <a:r>
-              <a:t>Debrief</a:t>
+              <a:t>09 · How It Works</a:t>
             </a:r>
           </a:p>
         </p:txBody>
@@ -4895,8 +5718,530 @@
         </p:nvSpPr>
         <p:spPr>
           <a:xfrm>
+            <a:off x="612648" y="2862071"/>
+            <a:ext cx="10966399" cy="3630169"/>
+          </a:xfrm>
+        </p:spPr>
+        <p:txBody>
+          <a:bodyPr wrap="square"/>
+          <a:lstStyle/>
+          <a:p>
+            <a:pPr/>
+            <a:r>
+              <a:rPr sz="1600"/>
+              <a:t>The model does the typing; a person does the deciding, and the log proves who decided what</a:t>
+            </a:r>
+          </a:p>
+          <a:p>
+            <a:pPr/>
+            <a:r>
+              <a:rPr sz="1600"/>
+              <a:t>A policy table sits in front of this line: which categories auto-send, which get a draft, which never see a model</a:t>
+            </a:r>
+          </a:p>
+          <a:p>
+            <a:pPr/>
+            <a:r>
+              <a:rPr sz="1600"/>
+              <a:t>The edits are data. Tomorrow's prompt improvement comes out of today's log.</a:t>
+            </a:r>
+          </a:p>
+        </p:txBody>
+      </p:sp>
+      <p:sp>
+        <p:nvSpPr>
+          <p:cNvPr id="4" name="Rounded Rectangle 3"/>
+          <p:cNvSpPr/>
+          <p:nvPr/>
+        </p:nvSpPr>
+        <p:spPr>
+          <a:xfrm>
+            <a:off x="612648" y="1554480"/>
+            <a:ext cx="1864095" cy="1033271"/>
+          </a:xfrm>
+          <a:prstGeom prst="roundRect">
+            <a:avLst/>
+          </a:prstGeom>
+          <a:noFill/>
+          <a:ln w="19050">
+            <a:solidFill>
+              <a:srgbClr val="000000"/>
+            </a:solidFill>
+          </a:ln>
+          <a:effectLst/>
+        </p:spPr>
+        <p:style>
+          <a:lnRef idx="1">
+            <a:schemeClr val="accent1"/>
+          </a:lnRef>
+          <a:fillRef idx="3">
+            <a:schemeClr val="accent1"/>
+          </a:fillRef>
+          <a:effectRef idx="2">
+            <a:schemeClr val="accent1"/>
+          </a:effectRef>
+          <a:fontRef idx="minor">
+            <a:schemeClr val="lt1"/>
+          </a:fontRef>
+        </p:style>
+        <p:txBody>
+          <a:bodyPr rtlCol="0" anchor="ctr" wrap="square" lIns="73152" rIns="73152"/>
+          <a:lstStyle/>
+          <a:p>
+            <a:pPr algn="ctr"/>
+            <a:r>
+              <a:rPr sz="1300">
+                <a:solidFill>
+                  <a:srgbClr val="000000"/>
+                </a:solidFill>
+              </a:rPr>
+              <a:t>Routed inquiry (from 07)</a:t>
+            </a:r>
+          </a:p>
+        </p:txBody>
+      </p:sp>
+      <p:sp>
+        <p:nvSpPr>
+          <p:cNvPr id="5" name="Right Arrow 4"/>
+          <p:cNvSpPr/>
+          <p:nvPr/>
+        </p:nvSpPr>
+        <p:spPr>
+          <a:xfrm>
+            <a:off x="2531607" y="1924811"/>
+            <a:ext cx="301752" cy="292608"/>
+          </a:xfrm>
+          <a:prstGeom prst="rightArrow">
+            <a:avLst/>
+          </a:prstGeom>
+          <a:solidFill>
+            <a:srgbClr val="000000"/>
+          </a:solidFill>
+          <a:ln>
+            <a:noFill/>
+          </a:ln>
+          <a:effectLst/>
+        </p:spPr>
+        <p:style>
+          <a:lnRef idx="1">
+            <a:schemeClr val="accent1"/>
+          </a:lnRef>
+          <a:fillRef idx="3">
+            <a:schemeClr val="accent1"/>
+          </a:fillRef>
+          <a:effectRef idx="2">
+            <a:schemeClr val="accent1"/>
+          </a:effectRef>
+          <a:fontRef idx="minor">
+            <a:schemeClr val="lt1"/>
+          </a:fontRef>
+        </p:style>
+        <p:txBody>
+          <a:bodyPr rtlCol="0" anchor="ctr"/>
+          <a:lstStyle/>
+          <a:p>
+            <a:pPr algn="ctr"/>
+          </a:p>
+        </p:txBody>
+      </p:sp>
+      <p:sp>
+        <p:nvSpPr>
+          <p:cNvPr id="6" name="Rounded Rectangle 5"/>
+          <p:cNvSpPr/>
+          <p:nvPr/>
+        </p:nvSpPr>
+        <p:spPr>
+          <a:xfrm>
+            <a:off x="2888223" y="1554480"/>
+            <a:ext cx="1864095" cy="1033271"/>
+          </a:xfrm>
+          <a:prstGeom prst="roundRect">
+            <a:avLst/>
+          </a:prstGeom>
+          <a:noFill/>
+          <a:ln w="19050">
+            <a:solidFill>
+              <a:srgbClr val="000000"/>
+            </a:solidFill>
+          </a:ln>
+          <a:effectLst/>
+        </p:spPr>
+        <p:style>
+          <a:lnRef idx="1">
+            <a:schemeClr val="accent1"/>
+          </a:lnRef>
+          <a:fillRef idx="3">
+            <a:schemeClr val="accent1"/>
+          </a:fillRef>
+          <a:effectRef idx="2">
+            <a:schemeClr val="accent1"/>
+          </a:effectRef>
+          <a:fontRef idx="minor">
+            <a:schemeClr val="lt1"/>
+          </a:fontRef>
+        </p:style>
+        <p:txBody>
+          <a:bodyPr rtlCol="0" anchor="ctr" wrap="square" lIns="73152" rIns="73152"/>
+          <a:lstStyle/>
+          <a:p>
+            <a:pPr algn="ctr"/>
+            <a:r>
+              <a:rPr sz="1300">
+                <a:solidFill>
+                  <a:srgbClr val="000000"/>
+                </a:solidFill>
+              </a:rPr>
+              <a:t>Retrieve park docs (05)</a:t>
+            </a:r>
+          </a:p>
+        </p:txBody>
+      </p:sp>
+      <p:sp>
+        <p:nvSpPr>
+          <p:cNvPr id="7" name="Right Arrow 6"/>
+          <p:cNvSpPr/>
+          <p:nvPr/>
+        </p:nvSpPr>
+        <p:spPr>
+          <a:xfrm>
+            <a:off x="4807183" y="1924811"/>
+            <a:ext cx="301752" cy="292608"/>
+          </a:xfrm>
+          <a:prstGeom prst="rightArrow">
+            <a:avLst/>
+          </a:prstGeom>
+          <a:solidFill>
+            <a:srgbClr val="000000"/>
+          </a:solidFill>
+          <a:ln>
+            <a:noFill/>
+          </a:ln>
+          <a:effectLst/>
+        </p:spPr>
+        <p:style>
+          <a:lnRef idx="1">
+            <a:schemeClr val="accent1"/>
+          </a:lnRef>
+          <a:fillRef idx="3">
+            <a:schemeClr val="accent1"/>
+          </a:fillRef>
+          <a:effectRef idx="2">
+            <a:schemeClr val="accent1"/>
+          </a:effectRef>
+          <a:fontRef idx="minor">
+            <a:schemeClr val="lt1"/>
+          </a:fontRef>
+        </p:style>
+        <p:txBody>
+          <a:bodyPr rtlCol="0" anchor="ctr"/>
+          <a:lstStyle/>
+          <a:p>
+            <a:pPr algn="ctr"/>
+          </a:p>
+        </p:txBody>
+      </p:sp>
+      <p:sp>
+        <p:nvSpPr>
+          <p:cNvPr id="8" name="Rounded Rectangle 7"/>
+          <p:cNvSpPr/>
+          <p:nvPr/>
+        </p:nvSpPr>
+        <p:spPr>
+          <a:xfrm>
+            <a:off x="5163799" y="1554480"/>
+            <a:ext cx="1864095" cy="1033271"/>
+          </a:xfrm>
+          <a:prstGeom prst="roundRect">
+            <a:avLst/>
+          </a:prstGeom>
+          <a:noFill/>
+          <a:ln w="19050">
+            <a:solidFill>
+              <a:srgbClr val="000000"/>
+            </a:solidFill>
+          </a:ln>
+          <a:effectLst/>
+        </p:spPr>
+        <p:style>
+          <a:lnRef idx="1">
+            <a:schemeClr val="accent1"/>
+          </a:lnRef>
+          <a:fillRef idx="3">
+            <a:schemeClr val="accent1"/>
+          </a:fillRef>
+          <a:effectRef idx="2">
+            <a:schemeClr val="accent1"/>
+          </a:effectRef>
+          <a:fontRef idx="minor">
+            <a:schemeClr val="lt1"/>
+          </a:fontRef>
+        </p:style>
+        <p:txBody>
+          <a:bodyPr rtlCol="0" anchor="ctr" wrap="square" lIns="73152" rIns="73152"/>
+          <a:lstStyle/>
+          <a:p>
+            <a:pPr algn="ctr"/>
+            <a:r>
+              <a:rPr sz="1300">
+                <a:solidFill>
+                  <a:srgbClr val="000000"/>
+                </a:solidFill>
+              </a:rPr>
+              <a:t>Model drafts a reply</a:t>
+            </a:r>
+          </a:p>
+        </p:txBody>
+      </p:sp>
+      <p:sp>
+        <p:nvSpPr>
+          <p:cNvPr id="9" name="Right Arrow 8"/>
+          <p:cNvSpPr/>
+          <p:nvPr/>
+        </p:nvSpPr>
+        <p:spPr>
+          <a:xfrm>
+            <a:off x="7082759" y="1924811"/>
+            <a:ext cx="301752" cy="292608"/>
+          </a:xfrm>
+          <a:prstGeom prst="rightArrow">
+            <a:avLst/>
+          </a:prstGeom>
+          <a:solidFill>
+            <a:srgbClr val="000000"/>
+          </a:solidFill>
+          <a:ln>
+            <a:noFill/>
+          </a:ln>
+          <a:effectLst/>
+        </p:spPr>
+        <p:style>
+          <a:lnRef idx="1">
+            <a:schemeClr val="accent1"/>
+          </a:lnRef>
+          <a:fillRef idx="3">
+            <a:schemeClr val="accent1"/>
+          </a:fillRef>
+          <a:effectRef idx="2">
+            <a:schemeClr val="accent1"/>
+          </a:effectRef>
+          <a:fontRef idx="minor">
+            <a:schemeClr val="lt1"/>
+          </a:fontRef>
+        </p:style>
+        <p:txBody>
+          <a:bodyPr rtlCol="0" anchor="ctr"/>
+          <a:lstStyle/>
+          <a:p>
+            <a:pPr algn="ctr"/>
+          </a:p>
+        </p:txBody>
+      </p:sp>
+      <p:sp>
+        <p:nvSpPr>
+          <p:cNvPr id="10" name="Rounded Rectangle 9"/>
+          <p:cNvSpPr/>
+          <p:nvPr/>
+        </p:nvSpPr>
+        <p:spPr>
+          <a:xfrm>
+            <a:off x="7439375" y="1554480"/>
+            <a:ext cx="1864095" cy="1033271"/>
+          </a:xfrm>
+          <a:prstGeom prst="roundRect">
+            <a:avLst/>
+          </a:prstGeom>
+          <a:noFill/>
+          <a:ln w="19050">
+            <a:solidFill>
+              <a:srgbClr val="000000"/>
+            </a:solidFill>
+          </a:ln>
+          <a:effectLst/>
+        </p:spPr>
+        <p:style>
+          <a:lnRef idx="1">
+            <a:schemeClr val="accent1"/>
+          </a:lnRef>
+          <a:fillRef idx="3">
+            <a:schemeClr val="accent1"/>
+          </a:fillRef>
+          <a:effectRef idx="2">
+            <a:schemeClr val="accent1"/>
+          </a:effectRef>
+          <a:fontRef idx="minor">
+            <a:schemeClr val="lt1"/>
+          </a:fontRef>
+        </p:style>
+        <p:txBody>
+          <a:bodyPr rtlCol="0" anchor="ctr" wrap="square" lIns="73152" rIns="73152"/>
+          <a:lstStyle/>
+          <a:p>
+            <a:pPr algn="ctr"/>
+            <a:r>
+              <a:rPr sz="1300">
+                <a:solidFill>
+                  <a:srgbClr val="000000"/>
+                </a:solidFill>
+              </a:rPr>
+              <a:t>Human: approve, edit, or reject</a:t>
+            </a:r>
+          </a:p>
+        </p:txBody>
+      </p:sp>
+      <p:sp>
+        <p:nvSpPr>
+          <p:cNvPr id="11" name="Right Arrow 10"/>
+          <p:cNvSpPr/>
+          <p:nvPr/>
+        </p:nvSpPr>
+        <p:spPr>
+          <a:xfrm>
+            <a:off x="9358335" y="1924811"/>
+            <a:ext cx="301752" cy="292608"/>
+          </a:xfrm>
+          <a:prstGeom prst="rightArrow">
+            <a:avLst/>
+          </a:prstGeom>
+          <a:solidFill>
+            <a:srgbClr val="000000"/>
+          </a:solidFill>
+          <a:ln>
+            <a:noFill/>
+          </a:ln>
+          <a:effectLst/>
+        </p:spPr>
+        <p:style>
+          <a:lnRef idx="1">
+            <a:schemeClr val="accent1"/>
+          </a:lnRef>
+          <a:fillRef idx="3">
+            <a:schemeClr val="accent1"/>
+          </a:fillRef>
+          <a:effectRef idx="2">
+            <a:schemeClr val="accent1"/>
+          </a:effectRef>
+          <a:fontRef idx="minor">
+            <a:schemeClr val="lt1"/>
+          </a:fontRef>
+        </p:style>
+        <p:txBody>
+          <a:bodyPr rtlCol="0" anchor="ctr"/>
+          <a:lstStyle/>
+          <a:p>
+            <a:pPr algn="ctr"/>
+          </a:p>
+        </p:txBody>
+      </p:sp>
+      <p:sp>
+        <p:nvSpPr>
+          <p:cNvPr id="12" name="Rounded Rectangle 11"/>
+          <p:cNvSpPr/>
+          <p:nvPr/>
+        </p:nvSpPr>
+        <p:spPr>
+          <a:xfrm>
+            <a:off x="9714951" y="1554480"/>
+            <a:ext cx="1864095" cy="1033271"/>
+          </a:xfrm>
+          <a:prstGeom prst="roundRect">
+            <a:avLst/>
+          </a:prstGeom>
+          <a:noFill/>
+          <a:ln w="19050">
+            <a:solidFill>
+              <a:srgbClr val="000000"/>
+            </a:solidFill>
+          </a:ln>
+          <a:effectLst/>
+        </p:spPr>
+        <p:style>
+          <a:lnRef idx="1">
+            <a:schemeClr val="accent1"/>
+          </a:lnRef>
+          <a:fillRef idx="3">
+            <a:schemeClr val="accent1"/>
+          </a:fillRef>
+          <a:effectRef idx="2">
+            <a:schemeClr val="accent1"/>
+          </a:effectRef>
+          <a:fontRef idx="minor">
+            <a:schemeClr val="lt1"/>
+          </a:fontRef>
+        </p:style>
+        <p:txBody>
+          <a:bodyPr rtlCol="0" anchor="ctr" wrap="square" lIns="73152" rIns="73152"/>
+          <a:lstStyle/>
+          <a:p>
+            <a:pPr algn="ctr"/>
+            <a:r>
+              <a:rPr sz="1300">
+                <a:solidFill>
+                  <a:srgbClr val="000000"/>
+                </a:solidFill>
+              </a:rPr>
+              <a:t>Send, and log draft + decision + final text</a:t>
+            </a:r>
+          </a:p>
+        </p:txBody>
+      </p:sp>
+    </p:spTree>
+  </p:cSld>
+  <p:clrMapOvr>
+    <a:masterClrMapping/>
+  </p:clrMapOvr>
+</p:sld>
+</file>
+
+<file path=ppt/slides/slide18.xml><?xml version="1.0" encoding="utf-8"?>
+<p:sld xmlns:a="http://schemas.openxmlformats.org/drawingml/2006/main" xmlns:p="http://schemas.openxmlformats.org/presentationml/2006/main" xmlns:r="http://schemas.openxmlformats.org/officeDocument/2006/relationships">
+  <p:cSld>
+    <p:spTree>
+      <p:nvGrpSpPr>
+        <p:cNvPr id="1" name=""/>
+        <p:cNvGrpSpPr/>
+        <p:nvPr/>
+      </p:nvGrpSpPr>
+      <p:grpSpPr/>
+      <p:sp>
+        <p:nvSpPr>
+          <p:cNvPr id="2" name="Title 1"/>
+          <p:cNvSpPr>
+            <a:spLocks noGrp="1"/>
+          </p:cNvSpPr>
+          <p:nvPr>
+            <p:ph type="title"/>
+          </p:nvPr>
+        </p:nvSpPr>
+        <p:spPr>
+          <a:xfrm>
+            <a:off x="612648" y="365760"/>
+            <a:ext cx="10966399" cy="1097280"/>
+          </a:xfrm>
+        </p:spPr>
+        <p:txBody>
+          <a:bodyPr/>
+          <a:lstStyle/>
+          <a:p>
+            <a:r>
+              <a:t>09 · Demo: What to Watch</a:t>
+            </a:r>
+          </a:p>
+        </p:txBody>
+      </p:sp>
+      <p:sp>
+        <p:nvSpPr>
+          <p:cNvPr id="3" name="Content Placeholder 2"/>
+          <p:cNvSpPr>
+            <a:spLocks noGrp="1"/>
+          </p:cNvSpPr>
+          <p:nvPr>
+            <p:ph idx="1"/>
+          </p:nvPr>
+        </p:nvSpPr>
+        <p:spPr>
+          <a:xfrm>
             <a:off x="612648" y="1600200"/>
-            <a:ext cx="10966399" cy="4800600"/>
+            <a:ext cx="10966399" cy="4892040"/>
           </a:xfrm>
         </p:spPr>
         <p:txBody>
@@ -4906,21 +6251,128 @@
             <a:pPr/>
             <a:r>
               <a:rPr sz="2000"/>
-              <a:t>Whose classifier caught both emergencies? Whose model wrote the reassuring note?</a:t>
+              <a:t>A routed queue of condition questions awaiting replies</a:t>
             </a:r>
           </a:p>
           <a:p>
             <a:pPr/>
             <a:r>
               <a:rPr sz="2000"/>
-              <a:t>Rows 7 to 9 of the decision framework are done</a:t>
+              <a:t>Draft one reply, grounded in park docs the way 05 grounded answers. It is good without being perfect.</a:t>
             </a:r>
           </a:p>
           <a:p>
             <a:pPr/>
             <a:r>
               <a:rPr sz="2000"/>
-              <a:t>Break, then Module 4, and everyone does it.</a:t>
+              <a:t>Approve one untouched, edit a second, reject a third and write it by hand</a:t>
+            </a:r>
+          </a:p>
+          <a:p>
+            <a:pPr/>
+            <a:r>
+              <a:rPr sz="2000"/>
+              <a:t>The audit log: draft, decision, final text, edit distance per reply</a:t>
+            </a:r>
+          </a:p>
+          <a:p>
+            <a:pPr/>
+            <a:r>
+              <a:rPr sz="2000"/>
+              <a:t>The policy table on screen; point at the emergency row</a:t>
+            </a:r>
+          </a:p>
+          <a:p>
+            <a:pPr/>
+            <a:r>
+              <a:rPr sz="2000"/>
+              <a:t>The edits from step 3 are tomorrow's prompt improvements. The human is the feedback signal as much as the safety check.</a:t>
+            </a:r>
+          </a:p>
+        </p:txBody>
+      </p:sp>
+    </p:spTree>
+  </p:cSld>
+  <p:clrMapOvr>
+    <a:masterClrMapping/>
+  </p:clrMapOvr>
+</p:sld>
+</file>
+
+<file path=ppt/slides/slide19.xml><?xml version="1.0" encoding="utf-8"?>
+<p:sld xmlns:a="http://schemas.openxmlformats.org/drawingml/2006/main" xmlns:p="http://schemas.openxmlformats.org/presentationml/2006/main" xmlns:r="http://schemas.openxmlformats.org/officeDocument/2006/relationships">
+  <p:cSld>
+    <p:spTree>
+      <p:nvGrpSpPr>
+        <p:cNvPr id="1" name=""/>
+        <p:cNvGrpSpPr/>
+        <p:nvPr/>
+      </p:nvGrpSpPr>
+      <p:grpSpPr/>
+      <p:sp>
+        <p:nvSpPr>
+          <p:cNvPr id="2" name="Title 1"/>
+          <p:cNvSpPr>
+            <a:spLocks noGrp="1"/>
+          </p:cNvSpPr>
+          <p:nvPr>
+            <p:ph type="title"/>
+          </p:nvPr>
+        </p:nvSpPr>
+        <p:spPr>
+          <a:xfrm>
+            <a:off x="612648" y="365760"/>
+            <a:ext cx="10966399" cy="1097280"/>
+          </a:xfrm>
+        </p:spPr>
+        <p:txBody>
+          <a:bodyPr/>
+          <a:lstStyle/>
+          <a:p>
+            <a:r>
+              <a:t>09 · Leadership Card</a:t>
+            </a:r>
+          </a:p>
+        </p:txBody>
+      </p:sp>
+      <p:sp>
+        <p:nvSpPr>
+          <p:cNvPr id="3" name="Content Placeholder 2"/>
+          <p:cNvSpPr>
+            <a:spLocks noGrp="1"/>
+          </p:cNvSpPr>
+          <p:nvPr>
+            <p:ph idx="1"/>
+          </p:nvPr>
+        </p:nvSpPr>
+        <p:spPr>
+          <a:xfrm>
+            <a:off x="612648" y="1600200"/>
+            <a:ext cx="10966399" cy="4892040"/>
+          </a:xfrm>
+        </p:spPr>
+        <p:txBody>
+          <a:bodyPr wrap="square"/>
+          <a:lstStyle/>
+          <a:p>
+            <a:pPr/>
+            <a:r>
+              <a:rPr sz="2000"/>
+              <a:t>When: any customer-facing or high-stakes generation. Support replies, quotes, claims decisions, anything sent under your name.</a:t>
+            </a:r>
+          </a:p>
+          <a:p>
+            <a:pPr/>
+            <a:r>
+              <a:rPr sz="2000"/>
+              <a:t>Cost: drafting is trivial; the approval UI, audit trail, and policy design are ordinary product engineering, measured in weeks. Often what makes the other nine shippable.</a:t>
+            </a:r>
+          </a:p>
+          <a:p>
+            <a:pPr/>
+            <a:r>
+              <a:rPr sz="2000"/>
+              <a:t>"The AI does the typing, our people keep the judgment, and nothing goes out without a human OK until the data says it can."</a:t>
             </a:r>
           </a:p>
         </p:txBody>
@@ -4982,7 +6434,7 @@
         <p:spPr>
           <a:xfrm>
             <a:off x="612648" y="1600200"/>
-            <a:ext cx="10966399" cy="4800600"/>
+            <a:ext cx="10966399" cy="4892040"/>
           </a:xfrm>
         </p:spPr>
         <p:txBody>
@@ -5021,6 +6473,185 @@
             <a:r>
               <a:rPr sz="2000"/>
               <a:t>A prompt instruction is a request. A policy lane is a guarantee.</a:t>
+            </a:r>
+          </a:p>
+        </p:txBody>
+      </p:sp>
+    </p:spTree>
+  </p:cSld>
+  <p:clrMapOvr>
+    <a:masterClrMapping/>
+  </p:clrMapOvr>
+</p:sld>
+</file>
+
+<file path=ppt/slides/slide20.xml><?xml version="1.0" encoding="utf-8"?>
+<p:sld xmlns:a="http://schemas.openxmlformats.org/drawingml/2006/main" xmlns:p="http://schemas.openxmlformats.org/presentationml/2006/main" xmlns:r="http://schemas.openxmlformats.org/officeDocument/2006/relationships">
+  <p:cSld>
+    <p:spTree>
+      <p:nvGrpSpPr>
+        <p:cNvPr id="1" name=""/>
+        <p:cNvGrpSpPr/>
+        <p:nvPr/>
+      </p:nvGrpSpPr>
+      <p:grpSpPr/>
+      <p:sp>
+        <p:nvSpPr>
+          <p:cNvPr id="2" name="Title 1"/>
+          <p:cNvSpPr>
+            <a:spLocks noGrp="1"/>
+          </p:cNvSpPr>
+          <p:nvPr>
+            <p:ph type="title"/>
+          </p:nvPr>
+        </p:nvSpPr>
+        <p:spPr>
+          <a:xfrm>
+            <a:off x="612648" y="365760"/>
+            <a:ext cx="10966399" cy="1097280"/>
+          </a:xfrm>
+        </p:spPr>
+        <p:txBody>
+          <a:bodyPr/>
+          <a:lstStyle/>
+          <a:p>
+            <a:r>
+              <a:t>Hands-On: 60 Minutes</a:t>
+            </a:r>
+          </a:p>
+        </p:txBody>
+      </p:sp>
+      <p:sp>
+        <p:nvSpPr>
+          <p:cNvPr id="3" name="Content Placeholder 2"/>
+          <p:cNvSpPr>
+            <a:spLocks noGrp="1"/>
+          </p:cNvSpPr>
+          <p:nvPr>
+            <p:ph idx="1"/>
+          </p:nvPr>
+        </p:nvSpPr>
+        <p:spPr>
+          <a:xfrm>
+            <a:off x="612648" y="1600200"/>
+            <a:ext cx="10966399" cy="4892040"/>
+          </a:xfrm>
+        </p:spPr>
+        <p:txBody>
+          <a:bodyPr wrap="square"/>
+          <a:lstStyle/>
+          <a:p>
+            <a:pPr/>
+            <a:r>
+              <a:rPr sz="2000"/>
+              <a:t>Start with 07 Classification (Recommended): structured output with an enum plus an honest scoring pass. The number that matters is whether both emergencies were caught. Missing one fails the lab at 19/20.</a:t>
+            </a:r>
+          </a:p>
+          <a:p>
+            <a:pPr/>
+            <a:r>
+              <a:rPr sz="2000"/>
+              <a:t>Then choose by energy as much as by interest:</a:t>
+            </a:r>
+          </a:p>
+          <a:p>
+            <a:pPr lvl="1"/>
+            <a:r>
+              <a:rPr sz="1800"/>
+              <a:t>08 Anomaly Detection: the most code. Ships precomputed vectors so you can go straight to the math.</a:t>
+            </a:r>
+          </a:p>
+          <a:p>
+            <a:pPr lvl="1"/>
+            <a:r>
+              <a:rPr sz="1800"/>
+              <a:t>09 Human-in-the-Loop: the least code; mostly a policy worksheet and a decision about what your software may do unsupervised. Running out of gas? Take this. It is also the one most likely to matter back at work.</a:t>
+            </a:r>
+          </a:p>
+        </p:txBody>
+      </p:sp>
+    </p:spTree>
+  </p:cSld>
+  <p:clrMapOvr>
+    <a:masterClrMapping/>
+  </p:clrMapOvr>
+</p:sld>
+</file>
+
+<file path=ppt/slides/slide21.xml><?xml version="1.0" encoding="utf-8"?>
+<p:sld xmlns:a="http://schemas.openxmlformats.org/drawingml/2006/main" xmlns:p="http://schemas.openxmlformats.org/presentationml/2006/main" xmlns:r="http://schemas.openxmlformats.org/officeDocument/2006/relationships">
+  <p:cSld>
+    <p:spTree>
+      <p:nvGrpSpPr>
+        <p:cNvPr id="1" name=""/>
+        <p:cNvGrpSpPr/>
+        <p:nvPr/>
+      </p:nvGrpSpPr>
+      <p:grpSpPr/>
+      <p:sp>
+        <p:nvSpPr>
+          <p:cNvPr id="2" name="Title 1"/>
+          <p:cNvSpPr>
+            <a:spLocks noGrp="1"/>
+          </p:cNvSpPr>
+          <p:nvPr>
+            <p:ph type="title"/>
+          </p:nvPr>
+        </p:nvSpPr>
+        <p:spPr>
+          <a:xfrm>
+            <a:off x="612648" y="365760"/>
+            <a:ext cx="10966399" cy="1097280"/>
+          </a:xfrm>
+        </p:spPr>
+        <p:txBody>
+          <a:bodyPr/>
+          <a:lstStyle/>
+          <a:p>
+            <a:r>
+              <a:t>Debrief</a:t>
+            </a:r>
+          </a:p>
+        </p:txBody>
+      </p:sp>
+      <p:sp>
+        <p:nvSpPr>
+          <p:cNvPr id="3" name="Content Placeholder 2"/>
+          <p:cNvSpPr>
+            <a:spLocks noGrp="1"/>
+          </p:cNvSpPr>
+          <p:nvPr>
+            <p:ph idx="1"/>
+          </p:nvPr>
+        </p:nvSpPr>
+        <p:spPr>
+          <a:xfrm>
+            <a:off x="612648" y="1600200"/>
+            <a:ext cx="10966399" cy="4892040"/>
+          </a:xfrm>
+        </p:spPr>
+        <p:txBody>
+          <a:bodyPr wrap="square"/>
+          <a:lstStyle/>
+          <a:p>
+            <a:pPr/>
+            <a:r>
+              <a:rPr sz="2000"/>
+              <a:t>Whose classifier caught both emergencies? Whose model wrote the reassuring note?</a:t>
+            </a:r>
+          </a:p>
+          <a:p>
+            <a:pPr/>
+            <a:r>
+              <a:rPr sz="2000"/>
+              <a:t>Rows 7 to 9 of the decision framework are done</a:t>
+            </a:r>
+          </a:p>
+          <a:p>
+            <a:pPr/>
+            <a:r>
+              <a:rPr sz="2000"/>
+              <a:t>Break, then Module 4, and everyone does it.</a:t>
             </a:r>
           </a:p>
         </p:txBody>
@@ -5064,7 +6695,7 @@
           <a:lstStyle/>
           <a:p>
             <a:r>
-              <a:t>07 · Classification &amp; Routing: The User Problem</a:t>
+              <a:t>Three Ways to Decide</a:t>
             </a:r>
           </a:p>
         </p:txBody>
@@ -5081,8 +6712,8 @@
         </p:nvSpPr>
         <p:spPr>
           <a:xfrm>
-            <a:off x="612648" y="1600200"/>
-            <a:ext cx="10966399" cy="4800600"/>
+            <a:off x="612648" y="5056631"/>
+            <a:ext cx="10966399" cy="1435609"/>
           </a:xfrm>
         </p:spPr>
         <p:txBody>
@@ -5091,29 +6722,1129 @@
           <a:p>
             <a:pPr/>
             <a:r>
-              <a:rPr sz="2000"/>
-              <a:t>Every message to Trailhead lands in one inbox: permits, conditions, complaints, lost-and-found, and occasionally an actual emergency</a:t>
+              <a:rPr sz="1400"/>
+              <a:t>Three shapes of decision: a label, a "this is unusual," and a signature</a:t>
             </a:r>
           </a:p>
           <a:p>
             <a:pPr/>
             <a:r>
-              <a:rPr sz="2000"/>
-              <a:t>A ranger triages by hand once or twice a day</a:t>
+              <a:rPr sz="1400"/>
+              <a:t>Only 07 and 09 ask a model to decide anything. 08 asks it for numbers and decides with arithmetic.</a:t>
             </a:r>
           </a:p>
           <a:p>
             <a:pPr/>
             <a:r>
-              <a:rPr sz="2000"/>
-              <a:t>The permit waits behind the granola questions; the emergency sits unread for four hours</a:t>
-            </a:r>
-          </a:p>
-          <a:p>
-            <a:pPr/>
-            <a:r>
-              <a:rPr sz="2000"/>
-              <a:t>The user's real problem: their message goes into a hole</a:t>
+              <a:rPr sz="1400"/>
+              <a:t>09 wraps the other two: the routing policy says which decisions a model may make alone</a:t>
+            </a:r>
+          </a:p>
+        </p:txBody>
+      </p:sp>
+      <p:sp>
+        <p:nvSpPr>
+          <p:cNvPr id="4" name="TextBox 3"/>
+          <p:cNvSpPr txBox="1"/>
+          <p:nvPr/>
+        </p:nvSpPr>
+        <p:spPr>
+          <a:xfrm>
+            <a:off x="612648" y="1554480"/>
+            <a:ext cx="1371600" cy="822960"/>
+          </a:xfrm>
+          <a:prstGeom prst="rect">
+            <a:avLst/>
+          </a:prstGeom>
+          <a:noFill/>
+        </p:spPr>
+        <p:txBody>
+          <a:bodyPr wrap="square" anchor="ctr">
+            <a:spAutoFit/>
+          </a:bodyPr>
+          <a:lstStyle/>
+          <a:p>
+            <a:r>
+              <a:rPr sz="1400" i="1"/>
+              <a:t>07 Classify</a:t>
+            </a:r>
+          </a:p>
+        </p:txBody>
+      </p:sp>
+      <p:sp>
+        <p:nvSpPr>
+          <p:cNvPr id="5" name="Rounded Rectangle 4"/>
+          <p:cNvSpPr/>
+          <p:nvPr/>
+        </p:nvSpPr>
+        <p:spPr>
+          <a:xfrm>
+            <a:off x="2075688" y="1554480"/>
+            <a:ext cx="2893466" cy="822960"/>
+          </a:xfrm>
+          <a:prstGeom prst="roundRect">
+            <a:avLst/>
+          </a:prstGeom>
+          <a:noFill/>
+          <a:ln w="19050">
+            <a:solidFill>
+              <a:srgbClr val="000000"/>
+            </a:solidFill>
+          </a:ln>
+          <a:effectLst/>
+        </p:spPr>
+        <p:style>
+          <a:lnRef idx="1">
+            <a:schemeClr val="accent1"/>
+          </a:lnRef>
+          <a:fillRef idx="3">
+            <a:schemeClr val="accent1"/>
+          </a:fillRef>
+          <a:effectRef idx="2">
+            <a:schemeClr val="accent1"/>
+          </a:effectRef>
+          <a:fontRef idx="minor">
+            <a:schemeClr val="lt1"/>
+          </a:fontRef>
+        </p:style>
+        <p:txBody>
+          <a:bodyPr rtlCol="0" anchor="ctr" wrap="square" lIns="73152" rIns="73152"/>
+          <a:lstStyle/>
+          <a:p>
+            <a:pPr algn="ctr"/>
+            <a:r>
+              <a:rPr sz="1500">
+                <a:solidFill>
+                  <a:srgbClr val="000000"/>
+                </a:solidFill>
+              </a:rPr>
+              <a:t>Inquiry</a:t>
+            </a:r>
+          </a:p>
+        </p:txBody>
+      </p:sp>
+      <p:sp>
+        <p:nvSpPr>
+          <p:cNvPr id="6" name="Right Arrow 5"/>
+          <p:cNvSpPr/>
+          <p:nvPr/>
+        </p:nvSpPr>
+        <p:spPr>
+          <a:xfrm>
+            <a:off x="5024018" y="1819656"/>
+            <a:ext cx="301752" cy="292608"/>
+          </a:xfrm>
+          <a:prstGeom prst="rightArrow">
+            <a:avLst/>
+          </a:prstGeom>
+          <a:solidFill>
+            <a:srgbClr val="000000"/>
+          </a:solidFill>
+          <a:ln>
+            <a:noFill/>
+          </a:ln>
+          <a:effectLst/>
+        </p:spPr>
+        <p:style>
+          <a:lnRef idx="1">
+            <a:schemeClr val="accent1"/>
+          </a:lnRef>
+          <a:fillRef idx="3">
+            <a:schemeClr val="accent1"/>
+          </a:fillRef>
+          <a:effectRef idx="2">
+            <a:schemeClr val="accent1"/>
+          </a:effectRef>
+          <a:fontRef idx="minor">
+            <a:schemeClr val="lt1"/>
+          </a:fontRef>
+        </p:style>
+        <p:txBody>
+          <a:bodyPr rtlCol="0" anchor="ctr"/>
+          <a:lstStyle/>
+          <a:p>
+            <a:pPr algn="ctr"/>
+          </a:p>
+        </p:txBody>
+      </p:sp>
+      <p:sp>
+        <p:nvSpPr>
+          <p:cNvPr id="7" name="Rounded Rectangle 6"/>
+          <p:cNvSpPr/>
+          <p:nvPr/>
+        </p:nvSpPr>
+        <p:spPr>
+          <a:xfrm>
+            <a:off x="5380634" y="1554480"/>
+            <a:ext cx="2893466" cy="822960"/>
+          </a:xfrm>
+          <a:prstGeom prst="roundRect">
+            <a:avLst/>
+          </a:prstGeom>
+          <a:noFill/>
+          <a:ln w="19050">
+            <a:solidFill>
+              <a:srgbClr val="000000"/>
+            </a:solidFill>
+          </a:ln>
+          <a:effectLst/>
+        </p:spPr>
+        <p:style>
+          <a:lnRef idx="1">
+            <a:schemeClr val="accent1"/>
+          </a:lnRef>
+          <a:fillRef idx="3">
+            <a:schemeClr val="accent1"/>
+          </a:fillRef>
+          <a:effectRef idx="2">
+            <a:schemeClr val="accent1"/>
+          </a:effectRef>
+          <a:fontRef idx="minor">
+            <a:schemeClr val="lt1"/>
+          </a:fontRef>
+        </p:style>
+        <p:txBody>
+          <a:bodyPr rtlCol="0" anchor="ctr" wrap="square" lIns="73152" rIns="73152"/>
+          <a:lstStyle/>
+          <a:p>
+            <a:pPr algn="ctr"/>
+            <a:r>
+              <a:rPr sz="1500">
+                <a:solidFill>
+                  <a:srgbClr val="000000"/>
+                </a:solidFill>
+              </a:rPr>
+              <a:t>Model picks one label from your list</a:t>
+            </a:r>
+          </a:p>
+        </p:txBody>
+      </p:sp>
+      <p:sp>
+        <p:nvSpPr>
+          <p:cNvPr id="8" name="Right Arrow 7"/>
+          <p:cNvSpPr/>
+          <p:nvPr/>
+        </p:nvSpPr>
+        <p:spPr>
+          <a:xfrm>
+            <a:off x="8328964" y="1819656"/>
+            <a:ext cx="301752" cy="292608"/>
+          </a:xfrm>
+          <a:prstGeom prst="rightArrow">
+            <a:avLst/>
+          </a:prstGeom>
+          <a:solidFill>
+            <a:srgbClr val="000000"/>
+          </a:solidFill>
+          <a:ln>
+            <a:noFill/>
+          </a:ln>
+          <a:effectLst/>
+        </p:spPr>
+        <p:style>
+          <a:lnRef idx="1">
+            <a:schemeClr val="accent1"/>
+          </a:lnRef>
+          <a:fillRef idx="3">
+            <a:schemeClr val="accent1"/>
+          </a:fillRef>
+          <a:effectRef idx="2">
+            <a:schemeClr val="accent1"/>
+          </a:effectRef>
+          <a:fontRef idx="minor">
+            <a:schemeClr val="lt1"/>
+          </a:fontRef>
+        </p:style>
+        <p:txBody>
+          <a:bodyPr rtlCol="0" anchor="ctr"/>
+          <a:lstStyle/>
+          <a:p>
+            <a:pPr algn="ctr"/>
+          </a:p>
+        </p:txBody>
+      </p:sp>
+      <p:sp>
+        <p:nvSpPr>
+          <p:cNvPr id="9" name="Rounded Rectangle 8"/>
+          <p:cNvSpPr/>
+          <p:nvPr/>
+        </p:nvSpPr>
+        <p:spPr>
+          <a:xfrm>
+            <a:off x="8685580" y="1554480"/>
+            <a:ext cx="2893466" cy="822960"/>
+          </a:xfrm>
+          <a:prstGeom prst="roundRect">
+            <a:avLst/>
+          </a:prstGeom>
+          <a:noFill/>
+          <a:ln w="19050">
+            <a:solidFill>
+              <a:srgbClr val="000000"/>
+            </a:solidFill>
+          </a:ln>
+          <a:effectLst/>
+        </p:spPr>
+        <p:style>
+          <a:lnRef idx="1">
+            <a:schemeClr val="accent1"/>
+          </a:lnRef>
+          <a:fillRef idx="3">
+            <a:schemeClr val="accent1"/>
+          </a:fillRef>
+          <a:effectRef idx="2">
+            <a:schemeClr val="accent1"/>
+          </a:effectRef>
+          <a:fontRef idx="minor">
+            <a:schemeClr val="lt1"/>
+          </a:fontRef>
+        </p:style>
+        <p:txBody>
+          <a:bodyPr rtlCol="0" anchor="ctr" wrap="square" lIns="73152" rIns="73152"/>
+          <a:lstStyle/>
+          <a:p>
+            <a:pPr algn="ctr"/>
+            <a:r>
+              <a:rPr sz="1500">
+                <a:solidFill>
+                  <a:srgbClr val="000000"/>
+                </a:solidFill>
+              </a:rPr>
+              <a:t>Queue</a:t>
+            </a:r>
+          </a:p>
+        </p:txBody>
+      </p:sp>
+      <p:sp>
+        <p:nvSpPr>
+          <p:cNvPr id="10" name="TextBox 9"/>
+          <p:cNvSpPr txBox="1"/>
+          <p:nvPr/>
+        </p:nvSpPr>
+        <p:spPr>
+          <a:xfrm>
+            <a:off x="612648" y="2651760"/>
+            <a:ext cx="1371600" cy="822960"/>
+          </a:xfrm>
+          <a:prstGeom prst="rect">
+            <a:avLst/>
+          </a:prstGeom>
+          <a:noFill/>
+        </p:spPr>
+        <p:txBody>
+          <a:bodyPr wrap="square" anchor="ctr">
+            <a:spAutoFit/>
+          </a:bodyPr>
+          <a:lstStyle/>
+          <a:p>
+            <a:r>
+              <a:rPr sz="1400" i="1"/>
+              <a:t>08 Detect</a:t>
+            </a:r>
+          </a:p>
+        </p:txBody>
+      </p:sp>
+      <p:sp>
+        <p:nvSpPr>
+          <p:cNvPr id="11" name="Rounded Rectangle 10"/>
+          <p:cNvSpPr/>
+          <p:nvPr/>
+        </p:nvSpPr>
+        <p:spPr>
+          <a:xfrm>
+            <a:off x="2075688" y="2651760"/>
+            <a:ext cx="1571487" cy="822960"/>
+          </a:xfrm>
+          <a:prstGeom prst="roundRect">
+            <a:avLst/>
+          </a:prstGeom>
+          <a:noFill/>
+          <a:ln w="19050">
+            <a:solidFill>
+              <a:srgbClr val="000000"/>
+            </a:solidFill>
+          </a:ln>
+          <a:effectLst/>
+        </p:spPr>
+        <p:style>
+          <a:lnRef idx="1">
+            <a:schemeClr val="accent1"/>
+          </a:lnRef>
+          <a:fillRef idx="3">
+            <a:schemeClr val="accent1"/>
+          </a:fillRef>
+          <a:effectRef idx="2">
+            <a:schemeClr val="accent1"/>
+          </a:effectRef>
+          <a:fontRef idx="minor">
+            <a:schemeClr val="lt1"/>
+          </a:fontRef>
+        </p:style>
+        <p:txBody>
+          <a:bodyPr rtlCol="0" anchor="ctr" wrap="square" lIns="73152" rIns="73152"/>
+          <a:lstStyle/>
+          <a:p>
+            <a:pPr algn="ctr"/>
+            <a:r>
+              <a:rPr sz="1300">
+                <a:solidFill>
+                  <a:srgbClr val="000000"/>
+                </a:solidFill>
+              </a:rPr>
+              <a:t>Reports</a:t>
+            </a:r>
+          </a:p>
+        </p:txBody>
+      </p:sp>
+      <p:sp>
+        <p:nvSpPr>
+          <p:cNvPr id="12" name="Right Arrow 11"/>
+          <p:cNvSpPr/>
+          <p:nvPr/>
+        </p:nvSpPr>
+        <p:spPr>
+          <a:xfrm>
+            <a:off x="3702039" y="2916936"/>
+            <a:ext cx="301752" cy="292608"/>
+          </a:xfrm>
+          <a:prstGeom prst="rightArrow">
+            <a:avLst/>
+          </a:prstGeom>
+          <a:solidFill>
+            <a:srgbClr val="000000"/>
+          </a:solidFill>
+          <a:ln>
+            <a:noFill/>
+          </a:ln>
+          <a:effectLst/>
+        </p:spPr>
+        <p:style>
+          <a:lnRef idx="1">
+            <a:schemeClr val="accent1"/>
+          </a:lnRef>
+          <a:fillRef idx="3">
+            <a:schemeClr val="accent1"/>
+          </a:fillRef>
+          <a:effectRef idx="2">
+            <a:schemeClr val="accent1"/>
+          </a:effectRef>
+          <a:fontRef idx="minor">
+            <a:schemeClr val="lt1"/>
+          </a:fontRef>
+        </p:style>
+        <p:txBody>
+          <a:bodyPr rtlCol="0" anchor="ctr"/>
+          <a:lstStyle/>
+          <a:p>
+            <a:pPr algn="ctr"/>
+          </a:p>
+        </p:txBody>
+      </p:sp>
+      <p:sp>
+        <p:nvSpPr>
+          <p:cNvPr id="13" name="Rounded Rectangle 12"/>
+          <p:cNvSpPr/>
+          <p:nvPr/>
+        </p:nvSpPr>
+        <p:spPr>
+          <a:xfrm>
+            <a:off x="4058655" y="2651760"/>
+            <a:ext cx="1571487" cy="822960"/>
+          </a:xfrm>
+          <a:prstGeom prst="roundRect">
+            <a:avLst/>
+          </a:prstGeom>
+          <a:noFill/>
+          <a:ln w="19050">
+            <a:solidFill>
+              <a:srgbClr val="000000"/>
+            </a:solidFill>
+          </a:ln>
+          <a:effectLst/>
+        </p:spPr>
+        <p:style>
+          <a:lnRef idx="1">
+            <a:schemeClr val="accent1"/>
+          </a:lnRef>
+          <a:fillRef idx="3">
+            <a:schemeClr val="accent1"/>
+          </a:fillRef>
+          <a:effectRef idx="2">
+            <a:schemeClr val="accent1"/>
+          </a:effectRef>
+          <a:fontRef idx="minor">
+            <a:schemeClr val="lt1"/>
+          </a:fontRef>
+        </p:style>
+        <p:txBody>
+          <a:bodyPr rtlCol="0" anchor="ctr" wrap="square" lIns="73152" rIns="73152"/>
+          <a:lstStyle/>
+          <a:p>
+            <a:pPr algn="ctr"/>
+            <a:r>
+              <a:rPr sz="1300">
+                <a:solidFill>
+                  <a:srgbClr val="000000"/>
+                </a:solidFill>
+              </a:rPr>
+              <a:t>Embed</a:t>
+            </a:r>
+          </a:p>
+        </p:txBody>
+      </p:sp>
+      <p:sp>
+        <p:nvSpPr>
+          <p:cNvPr id="14" name="Right Arrow 13"/>
+          <p:cNvSpPr/>
+          <p:nvPr/>
+        </p:nvSpPr>
+        <p:spPr>
+          <a:xfrm>
+            <a:off x="5685007" y="2916936"/>
+            <a:ext cx="301752" cy="292608"/>
+          </a:xfrm>
+          <a:prstGeom prst="rightArrow">
+            <a:avLst/>
+          </a:prstGeom>
+          <a:solidFill>
+            <a:srgbClr val="000000"/>
+          </a:solidFill>
+          <a:ln>
+            <a:noFill/>
+          </a:ln>
+          <a:effectLst/>
+        </p:spPr>
+        <p:style>
+          <a:lnRef idx="1">
+            <a:schemeClr val="accent1"/>
+          </a:lnRef>
+          <a:fillRef idx="3">
+            <a:schemeClr val="accent1"/>
+          </a:fillRef>
+          <a:effectRef idx="2">
+            <a:schemeClr val="accent1"/>
+          </a:effectRef>
+          <a:fontRef idx="minor">
+            <a:schemeClr val="lt1"/>
+          </a:fontRef>
+        </p:style>
+        <p:txBody>
+          <a:bodyPr rtlCol="0" anchor="ctr"/>
+          <a:lstStyle/>
+          <a:p>
+            <a:pPr algn="ctr"/>
+          </a:p>
+        </p:txBody>
+      </p:sp>
+      <p:sp>
+        <p:nvSpPr>
+          <p:cNvPr id="15" name="Rounded Rectangle 14"/>
+          <p:cNvSpPr/>
+          <p:nvPr/>
+        </p:nvSpPr>
+        <p:spPr>
+          <a:xfrm>
+            <a:off x="6041623" y="2651760"/>
+            <a:ext cx="1571487" cy="822960"/>
+          </a:xfrm>
+          <a:prstGeom prst="roundRect">
+            <a:avLst/>
+          </a:prstGeom>
+          <a:noFill/>
+          <a:ln w="19050">
+            <a:solidFill>
+              <a:srgbClr val="000000"/>
+            </a:solidFill>
+          </a:ln>
+          <a:effectLst/>
+        </p:spPr>
+        <p:style>
+          <a:lnRef idx="1">
+            <a:schemeClr val="accent1"/>
+          </a:lnRef>
+          <a:fillRef idx="3">
+            <a:schemeClr val="accent1"/>
+          </a:fillRef>
+          <a:effectRef idx="2">
+            <a:schemeClr val="accent1"/>
+          </a:effectRef>
+          <a:fontRef idx="minor">
+            <a:schemeClr val="lt1"/>
+          </a:fontRef>
+        </p:style>
+        <p:txBody>
+          <a:bodyPr rtlCol="0" anchor="ctr" wrap="square" lIns="73152" rIns="73152"/>
+          <a:lstStyle/>
+          <a:p>
+            <a:pPr algn="ctr"/>
+            <a:r>
+              <a:rPr sz="1300">
+                <a:solidFill>
+                  <a:srgbClr val="000000"/>
+                </a:solidFill>
+              </a:rPr>
+              <a:t>Distance from "normal"</a:t>
+            </a:r>
+          </a:p>
+        </p:txBody>
+      </p:sp>
+      <p:sp>
+        <p:nvSpPr>
+          <p:cNvPr id="16" name="Right Arrow 15"/>
+          <p:cNvSpPr/>
+          <p:nvPr/>
+        </p:nvSpPr>
+        <p:spPr>
+          <a:xfrm>
+            <a:off x="7667975" y="2916936"/>
+            <a:ext cx="301752" cy="292608"/>
+          </a:xfrm>
+          <a:prstGeom prst="rightArrow">
+            <a:avLst/>
+          </a:prstGeom>
+          <a:solidFill>
+            <a:srgbClr val="000000"/>
+          </a:solidFill>
+          <a:ln>
+            <a:noFill/>
+          </a:ln>
+          <a:effectLst/>
+        </p:spPr>
+        <p:style>
+          <a:lnRef idx="1">
+            <a:schemeClr val="accent1"/>
+          </a:lnRef>
+          <a:fillRef idx="3">
+            <a:schemeClr val="accent1"/>
+          </a:fillRef>
+          <a:effectRef idx="2">
+            <a:schemeClr val="accent1"/>
+          </a:effectRef>
+          <a:fontRef idx="minor">
+            <a:schemeClr val="lt1"/>
+          </a:fontRef>
+        </p:style>
+        <p:txBody>
+          <a:bodyPr rtlCol="0" anchor="ctr"/>
+          <a:lstStyle/>
+          <a:p>
+            <a:pPr algn="ctr"/>
+          </a:p>
+        </p:txBody>
+      </p:sp>
+      <p:sp>
+        <p:nvSpPr>
+          <p:cNvPr id="17" name="Rounded Rectangle 16"/>
+          <p:cNvSpPr/>
+          <p:nvPr/>
+        </p:nvSpPr>
+        <p:spPr>
+          <a:xfrm>
+            <a:off x="8024591" y="2651760"/>
+            <a:ext cx="1571487" cy="822960"/>
+          </a:xfrm>
+          <a:prstGeom prst="roundRect">
+            <a:avLst/>
+          </a:prstGeom>
+          <a:noFill/>
+          <a:ln w="19050">
+            <a:solidFill>
+              <a:srgbClr val="000000"/>
+            </a:solidFill>
+          </a:ln>
+          <a:effectLst/>
+        </p:spPr>
+        <p:style>
+          <a:lnRef idx="1">
+            <a:schemeClr val="accent1"/>
+          </a:lnRef>
+          <a:fillRef idx="3">
+            <a:schemeClr val="accent1"/>
+          </a:fillRef>
+          <a:effectRef idx="2">
+            <a:schemeClr val="accent1"/>
+          </a:effectRef>
+          <a:fontRef idx="minor">
+            <a:schemeClr val="lt1"/>
+          </a:fontRef>
+        </p:style>
+        <p:txBody>
+          <a:bodyPr rtlCol="0" anchor="ctr" wrap="square" lIns="73152" rIns="73152"/>
+          <a:lstStyle/>
+          <a:p>
+            <a:pPr algn="ctr"/>
+            <a:r>
+              <a:rPr sz="1300">
+                <a:solidFill>
+                  <a:srgbClr val="000000"/>
+                </a:solidFill>
+              </a:rPr>
+              <a:t>Threshold rule</a:t>
+            </a:r>
+          </a:p>
+        </p:txBody>
+      </p:sp>
+      <p:sp>
+        <p:nvSpPr>
+          <p:cNvPr id="18" name="Right Arrow 17"/>
+          <p:cNvSpPr/>
+          <p:nvPr/>
+        </p:nvSpPr>
+        <p:spPr>
+          <a:xfrm>
+            <a:off x="9650943" y="2916936"/>
+            <a:ext cx="301752" cy="292608"/>
+          </a:xfrm>
+          <a:prstGeom prst="rightArrow">
+            <a:avLst/>
+          </a:prstGeom>
+          <a:solidFill>
+            <a:srgbClr val="000000"/>
+          </a:solidFill>
+          <a:ln>
+            <a:noFill/>
+          </a:ln>
+          <a:effectLst/>
+        </p:spPr>
+        <p:style>
+          <a:lnRef idx="1">
+            <a:schemeClr val="accent1"/>
+          </a:lnRef>
+          <a:fillRef idx="3">
+            <a:schemeClr val="accent1"/>
+          </a:fillRef>
+          <a:effectRef idx="2">
+            <a:schemeClr val="accent1"/>
+          </a:effectRef>
+          <a:fontRef idx="minor">
+            <a:schemeClr val="lt1"/>
+          </a:fontRef>
+        </p:style>
+        <p:txBody>
+          <a:bodyPr rtlCol="0" anchor="ctr"/>
+          <a:lstStyle/>
+          <a:p>
+            <a:pPr algn="ctr"/>
+          </a:p>
+        </p:txBody>
+      </p:sp>
+      <p:sp>
+        <p:nvSpPr>
+          <p:cNvPr id="19" name="Rounded Rectangle 18"/>
+          <p:cNvSpPr/>
+          <p:nvPr/>
+        </p:nvSpPr>
+        <p:spPr>
+          <a:xfrm>
+            <a:off x="10007559" y="2651760"/>
+            <a:ext cx="1571487" cy="822960"/>
+          </a:xfrm>
+          <a:prstGeom prst="roundRect">
+            <a:avLst/>
+          </a:prstGeom>
+          <a:noFill/>
+          <a:ln w="19050">
+            <a:solidFill>
+              <a:srgbClr val="000000"/>
+            </a:solidFill>
+          </a:ln>
+          <a:effectLst/>
+        </p:spPr>
+        <p:style>
+          <a:lnRef idx="1">
+            <a:schemeClr val="accent1"/>
+          </a:lnRef>
+          <a:fillRef idx="3">
+            <a:schemeClr val="accent1"/>
+          </a:fillRef>
+          <a:effectRef idx="2">
+            <a:schemeClr val="accent1"/>
+          </a:effectRef>
+          <a:fontRef idx="minor">
+            <a:schemeClr val="lt1"/>
+          </a:fontRef>
+        </p:style>
+        <p:txBody>
+          <a:bodyPr rtlCol="0" anchor="ctr" wrap="square" lIns="73152" rIns="73152"/>
+          <a:lstStyle/>
+          <a:p>
+            <a:pPr algn="ctr"/>
+            <a:r>
+              <a:rPr sz="1300">
+                <a:solidFill>
+                  <a:srgbClr val="000000"/>
+                </a:solidFill>
+              </a:rPr>
+              <a:t>Alert</a:t>
+            </a:r>
+          </a:p>
+        </p:txBody>
+      </p:sp>
+      <p:sp>
+        <p:nvSpPr>
+          <p:cNvPr id="20" name="TextBox 19"/>
+          <p:cNvSpPr txBox="1"/>
+          <p:nvPr/>
+        </p:nvSpPr>
+        <p:spPr>
+          <a:xfrm>
+            <a:off x="612648" y="3749040"/>
+            <a:ext cx="1371600" cy="1033271"/>
+          </a:xfrm>
+          <a:prstGeom prst="rect">
+            <a:avLst/>
+          </a:prstGeom>
+          <a:noFill/>
+        </p:spPr>
+        <p:txBody>
+          <a:bodyPr wrap="square" anchor="ctr">
+            <a:spAutoFit/>
+          </a:bodyPr>
+          <a:lstStyle/>
+          <a:p>
+            <a:r>
+              <a:rPr sz="1400" i="1"/>
+              <a:t>09 Approve</a:t>
+            </a:r>
+          </a:p>
+        </p:txBody>
+      </p:sp>
+      <p:sp>
+        <p:nvSpPr>
+          <p:cNvPr id="21" name="Rounded Rectangle 20"/>
+          <p:cNvSpPr/>
+          <p:nvPr/>
+        </p:nvSpPr>
+        <p:spPr>
+          <a:xfrm>
+            <a:off x="2075688" y="3749040"/>
+            <a:ext cx="2067229" cy="1033271"/>
+          </a:xfrm>
+          <a:prstGeom prst="roundRect">
+            <a:avLst/>
+          </a:prstGeom>
+          <a:noFill/>
+          <a:ln w="19050">
+            <a:solidFill>
+              <a:srgbClr val="000000"/>
+            </a:solidFill>
+          </a:ln>
+          <a:effectLst/>
+        </p:spPr>
+        <p:style>
+          <a:lnRef idx="1">
+            <a:schemeClr val="accent1"/>
+          </a:lnRef>
+          <a:fillRef idx="3">
+            <a:schemeClr val="accent1"/>
+          </a:fillRef>
+          <a:effectRef idx="2">
+            <a:schemeClr val="accent1"/>
+          </a:effectRef>
+          <a:fontRef idx="minor">
+            <a:schemeClr val="lt1"/>
+          </a:fontRef>
+        </p:style>
+        <p:txBody>
+          <a:bodyPr rtlCol="0" anchor="ctr" wrap="square" lIns="73152" rIns="73152"/>
+          <a:lstStyle/>
+          <a:p>
+            <a:pPr algn="ctr"/>
+            <a:r>
+              <a:rPr sz="1500">
+                <a:solidFill>
+                  <a:srgbClr val="000000"/>
+                </a:solidFill>
+              </a:rPr>
+              <a:t>Inquiry</a:t>
+            </a:r>
+          </a:p>
+        </p:txBody>
+      </p:sp>
+      <p:sp>
+        <p:nvSpPr>
+          <p:cNvPr id="22" name="Right Arrow 21"/>
+          <p:cNvSpPr/>
+          <p:nvPr/>
+        </p:nvSpPr>
+        <p:spPr>
+          <a:xfrm>
+            <a:off x="4197781" y="4119371"/>
+            <a:ext cx="301752" cy="292608"/>
+          </a:xfrm>
+          <a:prstGeom prst="rightArrow">
+            <a:avLst/>
+          </a:prstGeom>
+          <a:solidFill>
+            <a:srgbClr val="000000"/>
+          </a:solidFill>
+          <a:ln>
+            <a:noFill/>
+          </a:ln>
+          <a:effectLst/>
+        </p:spPr>
+        <p:style>
+          <a:lnRef idx="1">
+            <a:schemeClr val="accent1"/>
+          </a:lnRef>
+          <a:fillRef idx="3">
+            <a:schemeClr val="accent1"/>
+          </a:fillRef>
+          <a:effectRef idx="2">
+            <a:schemeClr val="accent1"/>
+          </a:effectRef>
+          <a:fontRef idx="minor">
+            <a:schemeClr val="lt1"/>
+          </a:fontRef>
+        </p:style>
+        <p:txBody>
+          <a:bodyPr rtlCol="0" anchor="ctr"/>
+          <a:lstStyle/>
+          <a:p>
+            <a:pPr algn="ctr"/>
+          </a:p>
+        </p:txBody>
+      </p:sp>
+      <p:sp>
+        <p:nvSpPr>
+          <p:cNvPr id="23" name="Rounded Rectangle 22"/>
+          <p:cNvSpPr/>
+          <p:nvPr/>
+        </p:nvSpPr>
+        <p:spPr>
+          <a:xfrm>
+            <a:off x="4554397" y="3749040"/>
+            <a:ext cx="2067229" cy="1033271"/>
+          </a:xfrm>
+          <a:prstGeom prst="roundRect">
+            <a:avLst/>
+          </a:prstGeom>
+          <a:noFill/>
+          <a:ln w="19050">
+            <a:solidFill>
+              <a:srgbClr val="000000"/>
+            </a:solidFill>
+          </a:ln>
+          <a:effectLst/>
+        </p:spPr>
+        <p:style>
+          <a:lnRef idx="1">
+            <a:schemeClr val="accent1"/>
+          </a:lnRef>
+          <a:fillRef idx="3">
+            <a:schemeClr val="accent1"/>
+          </a:fillRef>
+          <a:effectRef idx="2">
+            <a:schemeClr val="accent1"/>
+          </a:effectRef>
+          <a:fontRef idx="minor">
+            <a:schemeClr val="lt1"/>
+          </a:fontRef>
+        </p:style>
+        <p:txBody>
+          <a:bodyPr rtlCol="0" anchor="ctr" wrap="square" lIns="73152" rIns="73152"/>
+          <a:lstStyle/>
+          <a:p>
+            <a:pPr algn="ctr"/>
+            <a:r>
+              <a:rPr sz="1500">
+                <a:solidFill>
+                  <a:srgbClr val="000000"/>
+                </a:solidFill>
+              </a:rPr>
+              <a:t>Model drafts a reply</a:t>
+            </a:r>
+          </a:p>
+        </p:txBody>
+      </p:sp>
+      <p:sp>
+        <p:nvSpPr>
+          <p:cNvPr id="24" name="Right Arrow 23"/>
+          <p:cNvSpPr/>
+          <p:nvPr/>
+        </p:nvSpPr>
+        <p:spPr>
+          <a:xfrm>
+            <a:off x="6676491" y="4119371"/>
+            <a:ext cx="301752" cy="292608"/>
+          </a:xfrm>
+          <a:prstGeom prst="rightArrow">
+            <a:avLst/>
+          </a:prstGeom>
+          <a:solidFill>
+            <a:srgbClr val="000000"/>
+          </a:solidFill>
+          <a:ln>
+            <a:noFill/>
+          </a:ln>
+          <a:effectLst/>
+        </p:spPr>
+        <p:style>
+          <a:lnRef idx="1">
+            <a:schemeClr val="accent1"/>
+          </a:lnRef>
+          <a:fillRef idx="3">
+            <a:schemeClr val="accent1"/>
+          </a:fillRef>
+          <a:effectRef idx="2">
+            <a:schemeClr val="accent1"/>
+          </a:effectRef>
+          <a:fontRef idx="minor">
+            <a:schemeClr val="lt1"/>
+          </a:fontRef>
+        </p:style>
+        <p:txBody>
+          <a:bodyPr rtlCol="0" anchor="ctr"/>
+          <a:lstStyle/>
+          <a:p>
+            <a:pPr algn="ctr"/>
+          </a:p>
+        </p:txBody>
+      </p:sp>
+      <p:sp>
+        <p:nvSpPr>
+          <p:cNvPr id="25" name="Rounded Rectangle 24"/>
+          <p:cNvSpPr/>
+          <p:nvPr/>
+        </p:nvSpPr>
+        <p:spPr>
+          <a:xfrm>
+            <a:off x="7033107" y="3749040"/>
+            <a:ext cx="2067229" cy="1033271"/>
+          </a:xfrm>
+          <a:prstGeom prst="roundRect">
+            <a:avLst/>
+          </a:prstGeom>
+          <a:noFill/>
+          <a:ln w="19050">
+            <a:solidFill>
+              <a:srgbClr val="000000"/>
+            </a:solidFill>
+          </a:ln>
+          <a:effectLst/>
+        </p:spPr>
+        <p:style>
+          <a:lnRef idx="1">
+            <a:schemeClr val="accent1"/>
+          </a:lnRef>
+          <a:fillRef idx="3">
+            <a:schemeClr val="accent1"/>
+          </a:fillRef>
+          <a:effectRef idx="2">
+            <a:schemeClr val="accent1"/>
+          </a:effectRef>
+          <a:fontRef idx="minor">
+            <a:schemeClr val="lt1"/>
+          </a:fontRef>
+        </p:style>
+        <p:txBody>
+          <a:bodyPr rtlCol="0" anchor="ctr" wrap="square" lIns="73152" rIns="73152"/>
+          <a:lstStyle/>
+          <a:p>
+            <a:pPr algn="ctr"/>
+            <a:r>
+              <a:rPr sz="1500">
+                <a:solidFill>
+                  <a:srgbClr val="000000"/>
+                </a:solidFill>
+              </a:rPr>
+              <a:t>Human approves, edits, or rejects</a:t>
+            </a:r>
+          </a:p>
+        </p:txBody>
+      </p:sp>
+      <p:sp>
+        <p:nvSpPr>
+          <p:cNvPr id="26" name="Right Arrow 25"/>
+          <p:cNvSpPr/>
+          <p:nvPr/>
+        </p:nvSpPr>
+        <p:spPr>
+          <a:xfrm>
+            <a:off x="9155201" y="4119371"/>
+            <a:ext cx="301752" cy="292608"/>
+          </a:xfrm>
+          <a:prstGeom prst="rightArrow">
+            <a:avLst/>
+          </a:prstGeom>
+          <a:solidFill>
+            <a:srgbClr val="000000"/>
+          </a:solidFill>
+          <a:ln>
+            <a:noFill/>
+          </a:ln>
+          <a:effectLst/>
+        </p:spPr>
+        <p:style>
+          <a:lnRef idx="1">
+            <a:schemeClr val="accent1"/>
+          </a:lnRef>
+          <a:fillRef idx="3">
+            <a:schemeClr val="accent1"/>
+          </a:fillRef>
+          <a:effectRef idx="2">
+            <a:schemeClr val="accent1"/>
+          </a:effectRef>
+          <a:fontRef idx="minor">
+            <a:schemeClr val="lt1"/>
+          </a:fontRef>
+        </p:style>
+        <p:txBody>
+          <a:bodyPr rtlCol="0" anchor="ctr"/>
+          <a:lstStyle/>
+          <a:p>
+            <a:pPr algn="ctr"/>
+          </a:p>
+        </p:txBody>
+      </p:sp>
+      <p:sp>
+        <p:nvSpPr>
+          <p:cNvPr id="27" name="Rounded Rectangle 26"/>
+          <p:cNvSpPr/>
+          <p:nvPr/>
+        </p:nvSpPr>
+        <p:spPr>
+          <a:xfrm>
+            <a:off x="9511817" y="3749040"/>
+            <a:ext cx="2067229" cy="1033271"/>
+          </a:xfrm>
+          <a:prstGeom prst="roundRect">
+            <a:avLst/>
+          </a:prstGeom>
+          <a:noFill/>
+          <a:ln w="19050">
+            <a:solidFill>
+              <a:srgbClr val="000000"/>
+            </a:solidFill>
+          </a:ln>
+          <a:effectLst/>
+        </p:spPr>
+        <p:style>
+          <a:lnRef idx="1">
+            <a:schemeClr val="accent1"/>
+          </a:lnRef>
+          <a:fillRef idx="3">
+            <a:schemeClr val="accent1"/>
+          </a:fillRef>
+          <a:effectRef idx="2">
+            <a:schemeClr val="accent1"/>
+          </a:effectRef>
+          <a:fontRef idx="minor">
+            <a:schemeClr val="lt1"/>
+          </a:fontRef>
+        </p:style>
+        <p:txBody>
+          <a:bodyPr rtlCol="0" anchor="ctr" wrap="square" lIns="73152" rIns="73152"/>
+          <a:lstStyle/>
+          <a:p>
+            <a:pPr algn="ctr"/>
+            <a:r>
+              <a:rPr sz="1500">
+                <a:solidFill>
+                  <a:srgbClr val="000000"/>
+                </a:solidFill>
+              </a:rPr>
+              <a:t>Send + log</a:t>
             </a:r>
           </a:p>
         </p:txBody>
@@ -5157,7 +7888,7 @@
           <a:lstStyle/>
           <a:p>
             <a:r>
-              <a:t>07 · The Concept</a:t>
+              <a:t>07 · Classification &amp; Routing: The User Problem</a:t>
             </a:r>
           </a:p>
         </p:txBody>
@@ -5175,7 +7906,7 @@
         <p:spPr>
           <a:xfrm>
             <a:off x="612648" y="1600200"/>
-            <a:ext cx="10966399" cy="4800600"/>
+            <a:ext cx="10966399" cy="4892040"/>
           </a:xfrm>
         </p:spPr>
         <p:txBody>
@@ -5185,28 +7916,28 @@
             <a:pPr/>
             <a:r>
               <a:rPr sz="2000"/>
-              <a:t>Classification again (03 was the warm-up), but now the label has consequences</a:t>
+              <a:t>Every message to Trailhead lands in one inbox: permits, conditions, complaints, lost-and-found, and occasionally an actual emergency</a:t>
             </a:r>
           </a:p>
           <a:p>
             <a:pPr/>
             <a:r>
               <a:rPr sz="2000"/>
-              <a:t>Zero-shot: describe the categories in plain language, no training data, which is where every team is on day one</a:t>
+              <a:t>A ranger triages by hand once or twice a day</a:t>
             </a:r>
           </a:p>
           <a:p>
             <a:pPr/>
             <a:r>
               <a:rPr sz="2000"/>
-              <a:t>The taxonomy is the product. When the model misfiles something, fix the description, not the model.</a:t>
+              <a:t>The permit waits behind the granola questions; the emergency sits unread for four hours</a:t>
             </a:r>
           </a:p>
           <a:p>
             <a:pPr/>
             <a:r>
               <a:rPr sz="2000"/>
-              <a:t>Tune so the expensive class never slips through, even at the cost of extra false alarms</a:t>
+              <a:t>The user's real problem: their message goes into a hole</a:t>
             </a:r>
           </a:p>
         </p:txBody>
@@ -5250,7 +7981,7 @@
           <a:lstStyle/>
           <a:p>
             <a:r>
-              <a:t>07 · Demo: What to Watch</a:t>
+              <a:t>07 · The Concept</a:t>
             </a:r>
           </a:p>
         </p:txBody>
@@ -5268,7 +7999,7 @@
         <p:spPr>
           <a:xfrm>
             <a:off x="612648" y="1600200"/>
-            <a:ext cx="10966399" cy="4800600"/>
+            <a:ext cx="10966399" cy="4892040"/>
           </a:xfrm>
         </p:spPr>
         <p:txBody>
@@ -5278,42 +8009,28 @@
             <a:pPr/>
             <a:r>
               <a:rPr sz="2000"/>
-              <a:t>Scroll the raw inbox; let the room find the emergency</a:t>
+              <a:t>Classification again (03 was the warm-up), but now the label has consequences</a:t>
             </a:r>
           </a:p>
           <a:p>
             <a:pPr/>
             <a:r>
               <a:rPr sz="2000"/>
-              <a:t>One classify method, taxonomy as plain-language descriptions, exactly one label</a:t>
+              <a:t>Zero-shot: describe the categories in plain language, no training data, which is where every team is on day one</a:t>
             </a:r>
           </a:p>
           <a:p>
             <a:pPr/>
             <a:r>
               <a:rPr sz="2000"/>
-              <a:t>The pile becomes tidy queues in seconds; the emergency is at the top of its own</a:t>
+              <a:t>The taxonomy is the product. When the model misfiles something, fix the description, not the model.</a:t>
             </a:r>
           </a:p>
           <a:p>
             <a:pPr/>
             <a:r>
               <a:rPr sz="2000"/>
-              <a:t>Planted misclassification (inq-0030): fix it by editing the category description, re-run</a:t>
-            </a:r>
-          </a:p>
-          <a:p>
-            <a:pPr/>
-            <a:r>
-              <a:rPr sz="2000"/>
-              <a:t>The unsure route is deliberately narrow, for messages two queues must both act on. inq-0035 lands there, correctly, and the description forbids sending anything dangerous to it.</a:t>
-            </a:r>
-          </a:p>
-          <a:p>
-            <a:pPr/>
-            <a:r>
-              <a:rPr sz="2000"/>
-              <a:t>Measured: 17/20 overall, 2/2 emergencies, every run</a:t>
+              <a:t>Tune so the expensive class never slips through, even at the cost of extra false alarms</a:t>
             </a:r>
           </a:p>
         </p:txBody>
@@ -5357,7 +8074,7 @@
           <a:lstStyle/>
           <a:p>
             <a:r>
-              <a:t>07 · Leadership Card</a:t>
+              <a:t>07 · How It Works</a:t>
             </a:r>
           </a:p>
         </p:txBody>
@@ -5374,8 +8091,8 @@
         </p:nvSpPr>
         <p:spPr>
           <a:xfrm>
-            <a:off x="612648" y="1600200"/>
-            <a:ext cx="10966399" cy="4800600"/>
+            <a:off x="612648" y="3099816"/>
+            <a:ext cx="10966399" cy="3392424"/>
           </a:xfrm>
         </p:spPr>
         <p:txBody>
@@ -5384,22 +8101,458 @@
           <a:p>
             <a:pPr/>
             <a:r>
-              <a:rPr sz="2000"/>
-              <a:t>When: any shared inbox, ticket queue, or intake form where a human sorts before anyone acts. Support, sales leads, HR, incoming documents.</a:t>
+              <a:rPr sz="1600"/>
+              <a:t>The taxonomy lives in the prompt as descriptions, so a misroute is fixed by editing a sentence, not code</a:t>
             </a:r>
           </a:p>
           <a:p>
             <a:pPr/>
             <a:r>
-              <a:rPr sz="2000"/>
-              <a:t>Cost: days. No training data to start; ongoing work is refining the taxonomy as traffic reveals edge cases. Local models make per-message cost roughly zero.</a:t>
+              <a:rPr sz="1600"/>
+              <a:t>Constrain the output: one label from the list, nothing else, and reject anything off-list</a:t>
             </a:r>
           </a:p>
           <a:p>
             <a:pPr/>
             <a:r>
-              <a:rPr sz="2000"/>
-              <a:t>"Every message reaches the right person in seconds, and the urgent ones stop waiting in line."</a:t>
+              <a:rPr sz="1600"/>
+              <a:t>"Unsure" is a real queue, deliberately narrow, for messages two teams must both see</a:t>
+            </a:r>
+          </a:p>
+        </p:txBody>
+      </p:sp>
+      <p:sp>
+        <p:nvSpPr>
+          <p:cNvPr id="4" name="Rounded Rectangle 3"/>
+          <p:cNvSpPr/>
+          <p:nvPr/>
+        </p:nvSpPr>
+        <p:spPr>
+          <a:xfrm>
+            <a:off x="612648" y="1554480"/>
+            <a:ext cx="1864095" cy="1271016"/>
+          </a:xfrm>
+          <a:prstGeom prst="roundRect">
+            <a:avLst/>
+          </a:prstGeom>
+          <a:noFill/>
+          <a:ln w="19050">
+            <a:solidFill>
+              <a:srgbClr val="000000"/>
+            </a:solidFill>
+          </a:ln>
+          <a:effectLst/>
+        </p:spPr>
+        <p:style>
+          <a:lnRef idx="1">
+            <a:schemeClr val="accent1"/>
+          </a:lnRef>
+          <a:fillRef idx="3">
+            <a:schemeClr val="accent1"/>
+          </a:fillRef>
+          <a:effectRef idx="2">
+            <a:schemeClr val="accent1"/>
+          </a:effectRef>
+          <a:fontRef idx="minor">
+            <a:schemeClr val="lt1"/>
+          </a:fontRef>
+        </p:style>
+        <p:txBody>
+          <a:bodyPr rtlCol="0" anchor="ctr" wrap="square" lIns="73152" rIns="73152"/>
+          <a:lstStyle/>
+          <a:p>
+            <a:pPr algn="ctr"/>
+            <a:r>
+              <a:rPr sz="1300">
+                <a:solidFill>
+                  <a:srgbClr val="000000"/>
+                </a:solidFill>
+              </a:rPr>
+              <a:t>Inquiry text</a:t>
+            </a:r>
+          </a:p>
+        </p:txBody>
+      </p:sp>
+      <p:sp>
+        <p:nvSpPr>
+          <p:cNvPr id="5" name="Right Arrow 4"/>
+          <p:cNvSpPr/>
+          <p:nvPr/>
+        </p:nvSpPr>
+        <p:spPr>
+          <a:xfrm>
+            <a:off x="2531607" y="2043684"/>
+            <a:ext cx="301752" cy="292608"/>
+          </a:xfrm>
+          <a:prstGeom prst="rightArrow">
+            <a:avLst/>
+          </a:prstGeom>
+          <a:solidFill>
+            <a:srgbClr val="000000"/>
+          </a:solidFill>
+          <a:ln>
+            <a:noFill/>
+          </a:ln>
+          <a:effectLst/>
+        </p:spPr>
+        <p:style>
+          <a:lnRef idx="1">
+            <a:schemeClr val="accent1"/>
+          </a:lnRef>
+          <a:fillRef idx="3">
+            <a:schemeClr val="accent1"/>
+          </a:fillRef>
+          <a:effectRef idx="2">
+            <a:schemeClr val="accent1"/>
+          </a:effectRef>
+          <a:fontRef idx="minor">
+            <a:schemeClr val="lt1"/>
+          </a:fontRef>
+        </p:style>
+        <p:txBody>
+          <a:bodyPr rtlCol="0" anchor="ctr"/>
+          <a:lstStyle/>
+          <a:p>
+            <a:pPr algn="ctr"/>
+          </a:p>
+        </p:txBody>
+      </p:sp>
+      <p:sp>
+        <p:nvSpPr>
+          <p:cNvPr id="6" name="Rounded Rectangle 5"/>
+          <p:cNvSpPr/>
+          <p:nvPr/>
+        </p:nvSpPr>
+        <p:spPr>
+          <a:xfrm>
+            <a:off x="2888223" y="1554480"/>
+            <a:ext cx="1864095" cy="1271016"/>
+          </a:xfrm>
+          <a:prstGeom prst="roundRect">
+            <a:avLst/>
+          </a:prstGeom>
+          <a:noFill/>
+          <a:ln w="19050">
+            <a:solidFill>
+              <a:srgbClr val="000000"/>
+            </a:solidFill>
+          </a:ln>
+          <a:effectLst/>
+        </p:spPr>
+        <p:style>
+          <a:lnRef idx="1">
+            <a:schemeClr val="accent1"/>
+          </a:lnRef>
+          <a:fillRef idx="3">
+            <a:schemeClr val="accent1"/>
+          </a:fillRef>
+          <a:effectRef idx="2">
+            <a:schemeClr val="accent1"/>
+          </a:effectRef>
+          <a:fontRef idx="minor">
+            <a:schemeClr val="lt1"/>
+          </a:fontRef>
+        </p:style>
+        <p:txBody>
+          <a:bodyPr rtlCol="0" anchor="ctr" wrap="square" lIns="73152" rIns="73152"/>
+          <a:lstStyle/>
+          <a:p>
+            <a:pPr algn="ctr"/>
+            <a:r>
+              <a:rPr sz="1300">
+                <a:solidFill>
+                  <a:srgbClr val="000000"/>
+                </a:solidFill>
+              </a:rPr>
+              <a:t>Prompt: each category described in plain language, plus "unsure"</a:t>
+            </a:r>
+          </a:p>
+        </p:txBody>
+      </p:sp>
+      <p:sp>
+        <p:nvSpPr>
+          <p:cNvPr id="7" name="Right Arrow 6"/>
+          <p:cNvSpPr/>
+          <p:nvPr/>
+        </p:nvSpPr>
+        <p:spPr>
+          <a:xfrm>
+            <a:off x="4807183" y="2043684"/>
+            <a:ext cx="301752" cy="292608"/>
+          </a:xfrm>
+          <a:prstGeom prst="rightArrow">
+            <a:avLst/>
+          </a:prstGeom>
+          <a:solidFill>
+            <a:srgbClr val="000000"/>
+          </a:solidFill>
+          <a:ln>
+            <a:noFill/>
+          </a:ln>
+          <a:effectLst/>
+        </p:spPr>
+        <p:style>
+          <a:lnRef idx="1">
+            <a:schemeClr val="accent1"/>
+          </a:lnRef>
+          <a:fillRef idx="3">
+            <a:schemeClr val="accent1"/>
+          </a:fillRef>
+          <a:effectRef idx="2">
+            <a:schemeClr val="accent1"/>
+          </a:effectRef>
+          <a:fontRef idx="minor">
+            <a:schemeClr val="lt1"/>
+          </a:fontRef>
+        </p:style>
+        <p:txBody>
+          <a:bodyPr rtlCol="0" anchor="ctr"/>
+          <a:lstStyle/>
+          <a:p>
+            <a:pPr algn="ctr"/>
+          </a:p>
+        </p:txBody>
+      </p:sp>
+      <p:sp>
+        <p:nvSpPr>
+          <p:cNvPr id="8" name="Rounded Rectangle 7"/>
+          <p:cNvSpPr/>
+          <p:nvPr/>
+        </p:nvSpPr>
+        <p:spPr>
+          <a:xfrm>
+            <a:off x="5163799" y="1554480"/>
+            <a:ext cx="1864095" cy="1271016"/>
+          </a:xfrm>
+          <a:prstGeom prst="roundRect">
+            <a:avLst/>
+          </a:prstGeom>
+          <a:noFill/>
+          <a:ln w="19050">
+            <a:solidFill>
+              <a:srgbClr val="000000"/>
+            </a:solidFill>
+          </a:ln>
+          <a:effectLst/>
+        </p:spPr>
+        <p:style>
+          <a:lnRef idx="1">
+            <a:schemeClr val="accent1"/>
+          </a:lnRef>
+          <a:fillRef idx="3">
+            <a:schemeClr val="accent1"/>
+          </a:fillRef>
+          <a:effectRef idx="2">
+            <a:schemeClr val="accent1"/>
+          </a:effectRef>
+          <a:fontRef idx="minor">
+            <a:schemeClr val="lt1"/>
+          </a:fontRef>
+        </p:style>
+        <p:txBody>
+          <a:bodyPr rtlCol="0" anchor="ctr" wrap="square" lIns="73152" rIns="73152"/>
+          <a:lstStyle/>
+          <a:p>
+            <a:pPr algn="ctr"/>
+            <a:r>
+              <a:rPr sz="1300">
+                <a:solidFill>
+                  <a:srgbClr val="000000"/>
+                </a:solidFill>
+              </a:rPr>
+              <a:t>llama3.2</a:t>
+            </a:r>
+          </a:p>
+        </p:txBody>
+      </p:sp>
+      <p:sp>
+        <p:nvSpPr>
+          <p:cNvPr id="9" name="Right Arrow 8"/>
+          <p:cNvSpPr/>
+          <p:nvPr/>
+        </p:nvSpPr>
+        <p:spPr>
+          <a:xfrm>
+            <a:off x="7082759" y="2043684"/>
+            <a:ext cx="301752" cy="292608"/>
+          </a:xfrm>
+          <a:prstGeom prst="rightArrow">
+            <a:avLst/>
+          </a:prstGeom>
+          <a:solidFill>
+            <a:srgbClr val="000000"/>
+          </a:solidFill>
+          <a:ln>
+            <a:noFill/>
+          </a:ln>
+          <a:effectLst/>
+        </p:spPr>
+        <p:style>
+          <a:lnRef idx="1">
+            <a:schemeClr val="accent1"/>
+          </a:lnRef>
+          <a:fillRef idx="3">
+            <a:schemeClr val="accent1"/>
+          </a:fillRef>
+          <a:effectRef idx="2">
+            <a:schemeClr val="accent1"/>
+          </a:effectRef>
+          <a:fontRef idx="minor">
+            <a:schemeClr val="lt1"/>
+          </a:fontRef>
+        </p:style>
+        <p:txBody>
+          <a:bodyPr rtlCol="0" anchor="ctr"/>
+          <a:lstStyle/>
+          <a:p>
+            <a:pPr algn="ctr"/>
+          </a:p>
+        </p:txBody>
+      </p:sp>
+      <p:sp>
+        <p:nvSpPr>
+          <p:cNvPr id="10" name="Rounded Rectangle 9"/>
+          <p:cNvSpPr/>
+          <p:nvPr/>
+        </p:nvSpPr>
+        <p:spPr>
+          <a:xfrm>
+            <a:off x="7439375" y="1554480"/>
+            <a:ext cx="1864095" cy="1271016"/>
+          </a:xfrm>
+          <a:prstGeom prst="roundRect">
+            <a:avLst/>
+          </a:prstGeom>
+          <a:noFill/>
+          <a:ln w="19050">
+            <a:solidFill>
+              <a:srgbClr val="000000"/>
+            </a:solidFill>
+          </a:ln>
+          <a:effectLst/>
+        </p:spPr>
+        <p:style>
+          <a:lnRef idx="1">
+            <a:schemeClr val="accent1"/>
+          </a:lnRef>
+          <a:fillRef idx="3">
+            <a:schemeClr val="accent1"/>
+          </a:fillRef>
+          <a:effectRef idx="2">
+            <a:schemeClr val="accent1"/>
+          </a:effectRef>
+          <a:fontRef idx="minor">
+            <a:schemeClr val="lt1"/>
+          </a:fontRef>
+        </p:style>
+        <p:txBody>
+          <a:bodyPr rtlCol="0" anchor="ctr" wrap="square" lIns="73152" rIns="73152"/>
+          <a:lstStyle/>
+          <a:p>
+            <a:pPr algn="ctr"/>
+            <a:r>
+              <a:rPr sz="1300">
+                <a:solidFill>
+                  <a:srgbClr val="000000"/>
+                </a:solidFill>
+              </a:rPr>
+              <a:t>Exactly one label</a:t>
+            </a:r>
+          </a:p>
+        </p:txBody>
+      </p:sp>
+      <p:sp>
+        <p:nvSpPr>
+          <p:cNvPr id="11" name="Right Arrow 10"/>
+          <p:cNvSpPr/>
+          <p:nvPr/>
+        </p:nvSpPr>
+        <p:spPr>
+          <a:xfrm>
+            <a:off x="9358335" y="2043684"/>
+            <a:ext cx="301752" cy="292608"/>
+          </a:xfrm>
+          <a:prstGeom prst="rightArrow">
+            <a:avLst/>
+          </a:prstGeom>
+          <a:solidFill>
+            <a:srgbClr val="000000"/>
+          </a:solidFill>
+          <a:ln>
+            <a:noFill/>
+          </a:ln>
+          <a:effectLst/>
+        </p:spPr>
+        <p:style>
+          <a:lnRef idx="1">
+            <a:schemeClr val="accent1"/>
+          </a:lnRef>
+          <a:fillRef idx="3">
+            <a:schemeClr val="accent1"/>
+          </a:fillRef>
+          <a:effectRef idx="2">
+            <a:schemeClr val="accent1"/>
+          </a:effectRef>
+          <a:fontRef idx="minor">
+            <a:schemeClr val="lt1"/>
+          </a:fontRef>
+        </p:style>
+        <p:txBody>
+          <a:bodyPr rtlCol="0" anchor="ctr"/>
+          <a:lstStyle/>
+          <a:p>
+            <a:pPr algn="ctr"/>
+          </a:p>
+        </p:txBody>
+      </p:sp>
+      <p:sp>
+        <p:nvSpPr>
+          <p:cNvPr id="12" name="Rounded Rectangle 11"/>
+          <p:cNvSpPr/>
+          <p:nvPr/>
+        </p:nvSpPr>
+        <p:spPr>
+          <a:xfrm>
+            <a:off x="9714951" y="1554480"/>
+            <a:ext cx="1864095" cy="1271016"/>
+          </a:xfrm>
+          <a:prstGeom prst="roundRect">
+            <a:avLst/>
+          </a:prstGeom>
+          <a:noFill/>
+          <a:ln w="19050">
+            <a:solidFill>
+              <a:srgbClr val="000000"/>
+            </a:solidFill>
+          </a:ln>
+          <a:effectLst/>
+        </p:spPr>
+        <p:style>
+          <a:lnRef idx="1">
+            <a:schemeClr val="accent1"/>
+          </a:lnRef>
+          <a:fillRef idx="3">
+            <a:schemeClr val="accent1"/>
+          </a:fillRef>
+          <a:effectRef idx="2">
+            <a:schemeClr val="accent1"/>
+          </a:effectRef>
+          <a:fontRef idx="minor">
+            <a:schemeClr val="lt1"/>
+          </a:fontRef>
+        </p:style>
+        <p:txBody>
+          <a:bodyPr rtlCol="0" anchor="ctr" wrap="square" lIns="73152" rIns="73152"/>
+          <a:lstStyle/>
+          <a:p>
+            <a:pPr algn="ctr"/>
+            <a:r>
+              <a:rPr sz="1300">
+                <a:solidFill>
+                  <a:srgbClr val="000000"/>
+                </a:solidFill>
+              </a:rPr>
+              <a:t>Route to that queue</a:t>
             </a:r>
           </a:p>
         </p:txBody>
@@ -5443,7 +8596,7 @@
           <a:lstStyle/>
           <a:p>
             <a:r>
-              <a:t>08 · Anomaly Detection: The User Problem</a:t>
+              <a:t>07 · Demo: What to Watch</a:t>
             </a:r>
           </a:p>
         </p:txBody>
@@ -5461,7 +8614,7 @@
         <p:spPr>
           <a:xfrm>
             <a:off x="612648" y="1600200"/>
-            <a:ext cx="10966399" cy="4800600"/>
+            <a:ext cx="10966399" cy="4892040"/>
           </a:xfrm>
         </p:spPr>
         <p:txBody>
@@ -5471,21 +8624,42 @@
             <a:pPr/>
             <a:r>
               <a:rPr sz="2000"/>
-              <a:t>~500 trail-condition reports a season across 200 trails. Almost all say "muddy in spots, otherwise fine."</a:t>
+              <a:t>Scroll the raw inbox; let the room find the emergency</a:t>
             </a:r>
           </a:p>
           <a:p>
             <a:pPr/>
             <a:r>
               <a:rPr sz="2000"/>
-              <a:t>Then in one week three hikers report a washed-out bridge on the same trail, and a fourth mentions aggressive bear activity two trails over</a:t>
+              <a:t>One classify method, taxonomy as plain-language descriptions, exactly one label</a:t>
             </a:r>
           </a:p>
           <a:p>
             <a:pPr/>
             <a:r>
               <a:rPr sz="2000"/>
-              <a:t>Nobody notices. The park hears about the bridge from a one-star review a month later.</a:t>
+              <a:t>The pile becomes tidy queues in seconds; the emergency is at the top of its own</a:t>
+            </a:r>
+          </a:p>
+          <a:p>
+            <a:pPr/>
+            <a:r>
+              <a:rPr sz="2000"/>
+              <a:t>Planted misclassification (inq-0030): fix it by editing the category description, re-run</a:t>
+            </a:r>
+          </a:p>
+          <a:p>
+            <a:pPr/>
+            <a:r>
+              <a:rPr sz="2000"/>
+              <a:t>The unsure route is deliberately narrow, for messages two queues must both act on. inq-0035 lands there, correctly, and the description forbids sending anything dangerous to it.</a:t>
+            </a:r>
+          </a:p>
+          <a:p>
+            <a:pPr/>
+            <a:r>
+              <a:rPr sz="2000"/>
+              <a:t>Measured: 17/20 overall, 2/2 emergencies, every run</a:t>
             </a:r>
           </a:p>
         </p:txBody>
@@ -5529,7 +8703,7 @@
           <a:lstStyle/>
           <a:p>
             <a:r>
-              <a:t>08 · The Concept</a:t>
+              <a:t>07 · Leadership Card</a:t>
             </a:r>
           </a:p>
         </p:txBody>
@@ -5547,7 +8721,7 @@
         <p:spPr>
           <a:xfrm>
             <a:off x="612648" y="1600200"/>
-            <a:ext cx="10966399" cy="4800600"/>
+            <a:ext cx="10966399" cy="4892040"/>
           </a:xfrm>
         </p:spPr>
         <p:txBody>
@@ -5557,28 +8731,21 @@
             <a:pPr/>
             <a:r>
               <a:rPr sz="2000"/>
-              <a:t>Barely an AI feature: embeddings plus arithmetic</a:t>
+              <a:t>When: any shared inbox, ticket queue, or intake form where a human sorts before anyone acts. Support, sales leads, HR, incoming documents.</a:t>
             </a:r>
           </a:p>
           <a:p>
             <a:pPr/>
             <a:r>
               <a:rPr sz="2000"/>
-              <a:t>Embed a trail's reports; the routine ones cluster. Average them: a centroid, the center of "normal."</a:t>
+              <a:t>Cost: days. No training data to start; ongoing work is refining the taxonomy as traffic reveals edge cases. Local models make per-message cost roughly zero.</a:t>
             </a:r>
           </a:p>
           <a:p>
             <a:pPr/>
             <a:r>
               <a:rPr sz="2000"/>
-              <a:t>A report's distance from the centroid is its anomaly score. "Bridge washed out" sits farther from the mud cluster than mud reports sit from each other.</a:t>
-            </a:r>
-          </a:p>
-          <a:p>
-            <a:pPr/>
-            <a:r>
-              <a:rPr sz="2000"/>
-              <a:t>Cosine distance and a threshold do most of the job</a:t>
+              <a:t>"Every message reaches the right person in seconds, and the urgent ones stop waiting in line."</a:t>
             </a:r>
           </a:p>
         </p:txBody>
@@ -5622,7 +8789,7 @@
           <a:lstStyle/>
           <a:p>
             <a:r>
-              <a:t>08 · Demo: What to Watch</a:t>
+              <a:t>08 · Anomaly Detection: The User Problem</a:t>
             </a:r>
           </a:p>
         </p:txBody>
@@ -5640,7 +8807,7 @@
         <p:spPr>
           <a:xfrm>
             <a:off x="612648" y="1600200"/>
-            <a:ext cx="10966399" cy="4800600"/>
+            <a:ext cx="10966399" cy="4892040"/>
           </a:xfrm>
         </p:spPr>
         <p:txBody>
@@ -5650,49 +8817,21 @@
             <a:pPr/>
             <a:r>
               <a:rPr sz="2000"/>
-              <a:t>Scroll the report stream, which is boring on purpose. Nobody can find the problem.</a:t>
+              <a:t>~500 trail-condition reports a season across 200 trails. Almost all say "muddy in spots, otherwise fine."</a:t>
             </a:r>
           </a:p>
           <a:p>
             <a:pPr/>
             <a:r>
               <a:rPr sz="2000"/>
-              <a:t>Centroid on one slide: the center of normal</a:t>
+              <a:t>Then in one week three hikers report a washed-out bridge on the same trail, and a fourth mentions aggressive bear activity two trails over</a:t>
             </a:r>
           </a:p>
           <a:p>
             <a:pPr/>
             <a:r>
               <a:rPr sz="2000"/>
-              <a:t>--raw first: the washout reports scatter through the middle of the list. Let that sit for a second.</a:t>
-            </a:r>
-          </a:p>
-          <a:p>
-            <a:pPr/>
-            <a:r>
-              <a:rPr sz="2000"/>
-              <a:t>Add the model's task prefix (classification:): a washout report jumps from rank 11 to rank 2, and the mud reports settle to the bottom</a:t>
-            </a:r>
-          </a:p>
-          <a:p>
-            <a:pPr/>
-            <a:r>
-              <a:rPr sz="2000"/>
-              <a:t>The alert rule: distance beyond threshold, plus two flagged reports within 14 days. One alert fires, with three genuine washout reports in it and no false positives.</a:t>
-            </a:r>
-          </a:p>
-          <a:p>
-            <a:pPr/>
-            <a:r>
-              <a:rPr sz="2000"/>
-              <a:t>Second trail: the bear spike, cleaner because that trail's routine chatter is more uniform</a:t>
-            </a:r>
-          </a:p>
-          <a:p>
-            <a:pPr/>
-            <a:r>
-              <a:rPr sz="2000"/>
-              <a:t>Count the model calls: embeddings only. Everything else was subtraction.</a:t>
+              <a:t>Nobody notices. The park hears about the bridge from a one-star review a month later.</a:t>
             </a:r>
           </a:p>
         </p:txBody>

--- a/docs/slides/pptx/M3-deciding.pptx
+++ b/docs/slides/pptx/M3-deciding.pptx
@@ -2320,7 +2320,7 @@
           <a:lstStyle/>
           <a:p>
             <a:r>
-              <a:t>One row per advance. Only 07 and 09 ask a model to decide anything; 08 decides with arithmetic. The routing policy in 09 says which decisions a model may make alone. Say which box in each row is the decision.</a:t>
+              <a:t>08 detect: embed, measure distance from "normal," apply a threshold rule. The decision is arithmetic.</a:t>
             </a:r>
           </a:p>
         </p:txBody>
@@ -2390,7 +2390,7 @@
           <a:lstStyle/>
           <a:p>
             <a:r>
-              <a:t>One row per advance. Only 07 and 09 ask a model to decide anything; 08 decides with arithmetic. The routing policy in 09 says which decisions a model may make alone. Say which box in each row is the decision.</a:t>
+              <a:t>09 approve: the model drafts, a human approves, edits, or rejects, then send and log. The decision is a person's.</a:t>
             </a:r>
           </a:p>
         </p:txBody>
@@ -2460,7 +2460,7 @@
           <a:lstStyle/>
           <a:p>
             <a:r>
-              <a:t>One row per advance. Only 07 and 09 ask a model to decide anything; 08 decides with arithmetic. The routing policy in 09 says which decisions a model may make alone. Say which box in each row is the decision.</a:t>
+              <a:t>A label, a "this is unusual," a signature. Three different kinds of decision.</a:t>
             </a:r>
           </a:p>
         </p:txBody>
@@ -2530,7 +2530,7 @@
           <a:lstStyle/>
           <a:p>
             <a:r>
-              <a:t>One row per advance. Only 07 and 09 ask a model to decide anything; 08 decides with arithmetic. The routing policy in 09 says which decisions a model may make alone. Say which box in each row is the decision.</a:t>
+              <a:t>Only 07 and 09 ask a model to decide anything; 08 asks it only for numbers.</a:t>
             </a:r>
           </a:p>
         </p:txBody>
@@ -2600,7 +2600,7 @@
           <a:lstStyle/>
           <a:p>
             <a:r>
-              <a:t>One row per advance. Only 07 and 09 ask a model to decide anything; 08 decides with arithmetic. The routing policy in 09 says which decisions a model may make alone. Say which box in each row is the decision.</a:t>
+              <a:t>09 wraps the other two: the routing policy says which decisions a model may make alone.</a:t>
             </a:r>
           </a:p>
         </p:txBody>
@@ -2815,22 +2815,55 @@
           <a:lstStyle/>
           <a:p>
             <a:r>
-              <a:t>The unsure route is deliberately narrow, for messages two queues must both act on, and its description forbids sending anything dangerous to it. Constrain the output: one label from the list, reject anything off-list.</a:t>
-            </a:r>
-          </a:p>
-          <a:p>
-            <a:r>
-              <a:t>Close on asymmetric cost: what this system is tuned never to miss, and what noise level that tolerance buys.</a:t>
-            </a:r>
-          </a:p>
-          <a:p>
-            <a:r>
-              <a:t>Demo script (~8 min; step 5 is the first cut):</a:t>
-            </a:r>
-          </a:p>
-          <a:p>
-            <a:r>
-              <a:t>1. Scroll the raw inbox, </a:t>
+              <a:t>~8 min · Terminal 2 · </a:t>
+            </a:r>
+            <a:r>
+              <a:rPr>
+                <a:latin typeface="Consolas"/>
+              </a:rPr>
+              <a:t>cd modules/M3-deciding/F07-classification-routing/dotnet</a:t>
+            </a:r>
+          </a:p>
+          <a:p>
+            <a:r>
+              <a:t>Files: </a:t>
+            </a:r>
+            <a:r>
+              <a:rPr>
+                <a:latin typeface="Consolas"/>
+              </a:rPr>
+              <a:t>inquiries.jsonl</a:t>
+            </a:r>
+            <a:r>
+              <a:t> = the full inbox, 100 · </a:t>
+            </a:r>
+            <a:r>
+              <a:rPr>
+                <a:latin typeface="Consolas"/>
+              </a:rPr>
+              <a:t>inquiries-slice.jsonl</a:t>
+            </a:r>
+            <a:r>
+              <a:t> = the 20 the demo scores · </a:t>
+            </a:r>
+            <a:r>
+              <a:rPr>
+                <a:latin typeface="Consolas"/>
+              </a:rPr>
+              <a:t>reference-labels.json</a:t>
+            </a:r>
+            <a:r>
+              <a:t> = hand labels</a:t>
+            </a:r>
+          </a:p>
+          <a:p>
+            <a:r>
+              <a:t>Args: an inquiry id; starter default inq-0005, complete with none = all 20</a:t>
+            </a:r>
+          </a:p>
+          <a:p>
+            <a:r>
+              <a:t>1. Open </a:t>
             </a:r>
             <a:r>
               <a:rPr>
@@ -2839,32 +2872,91 @@
               <a:t>data/inquiries.jsonl</a:t>
             </a:r>
             <a:r>
-              <a:t>, mixed and unlabeled, and let the room spot the emergency buried in it.</a:t>
-            </a:r>
-          </a:p>
-          <a:p>
-            <a:r>
-              <a:t>2. Starter: one classify method with the taxonomy written as plain-language category descriptions in the prompt, returning exactly one label.</a:t>
-            </a:r>
-          </a:p>
-          <a:p>
-            <a:r>
-              <a:t>3. Run the inbox through it and print each message under its routed queue. The payoff is that the pile becomes a set of tidy queues in seconds, with the emergency at the top of its own.</a:t>
-            </a:r>
-          </a:p>
-          <a:p>
-            <a:r>
-              <a:t>4. Show a misclassification (inq-0030 is planted). Fix it by editing the category description, not the code, and re-run to show the fix landing.</a:t>
-            </a:r>
-          </a:p>
-          <a:p>
-            <a:r>
-              <a:t>5. Walk the "unsure" route in the taxonomy: it is deliberately narrow, for messages that two queues must both act on. Show inq-0035 landing there, which is correct behavior, and point out that the description forbids sending anything dangerous to it.</a:t>
-            </a:r>
-          </a:p>
-          <a:p>
-            <a:r>
-              <a:t>6. Close on asymmetric error costs: what this system is tuned never to miss, and what noise level that tolerance buys.</a:t>
+              <a:t>, scroll. Let the room find the emergency.</a:t>
+            </a:r>
+          </a:p>
+          <a:p>
+            <a:r>
+              <a:t>2. Before: </a:t>
+            </a:r>
+            <a:r>
+              <a:rPr>
+                <a:latin typeface="Consolas"/>
+              </a:rPr>
+              <a:t>cd starter &amp;&amp; dotnet run</a:t>
+            </a:r>
+            <a:r>
+              <a:t>. One label, free text. Nothing stops a label that does not exist.</a:t>
+            </a:r>
+          </a:p>
+          <a:p>
+            <a:r>
+              <a:t>3. After: </a:t>
+            </a:r>
+            <a:r>
+              <a:rPr>
+                <a:latin typeface="Consolas"/>
+              </a:rPr>
+              <a:t>cd ../complete &amp;&amp; dotnet run</a:t>
+            </a:r>
+            <a:r>
+              <a:t>. All 20 routed and scored, enum-constrained. The emergency at the top of its own queue.</a:t>
+            </a:r>
+          </a:p>
+          <a:p>
+            <a:r>
+              <a:t>4. inq-0030 is wrong. Edit its category description in </a:t>
+            </a:r>
+            <a:r>
+              <a:rPr>
+                <a:latin typeface="Consolas"/>
+              </a:rPr>
+              <a:t>Program.cs</a:t>
+            </a:r>
+            <a:r>
+              <a:t>, not the code. </a:t>
+            </a:r>
+            <a:r>
+              <a:rPr>
+                <a:latin typeface="Consolas"/>
+              </a:rPr>
+              <a:t>dotnet run</a:t>
+            </a:r>
+            <a:r>
+              <a:t> again.</a:t>
+            </a:r>
+          </a:p>
+          <a:p>
+            <a:r>
+              <a:t>5. </a:t>
+            </a:r>
+            <a:r>
+              <a:rPr>
+                <a:latin typeface="Consolas"/>
+              </a:rPr>
+              <a:t>dotnet run -- inq-0035</a:t>
+            </a:r>
+            <a:r>
+              <a:t>: </a:t>
+            </a:r>
+            <a:r>
+              <a:rPr>
+                <a:latin typeface="Consolas"/>
+              </a:rPr>
+              <a:t>unsure</a:t>
+            </a:r>
+            <a:r>
+              <a:t>, correctly. The description forbids anything dangerous landing here.</a:t>
+            </a:r>
+          </a:p>
+          <a:p>
+            <a:r>
+              <a:t>6. 17/20, 2/2 emergencies. Which number matters.</a:t>
+            </a:r>
+          </a:p>
+          <a:p>
+            <a:r>
+              <a:t>Cut: 5.</a:t>
             </a:r>
           </a:p>
         </p:txBody>
@@ -2934,12 +3026,7 @@
           <a:lstStyle/>
           <a:p>
             <a:r>
-              <a:t>Support, sales leads, HR, incoming documents. Ongoing work is refining the taxonomy as traffic reveals edge cases. Row 7.</a:t>
-            </a:r>
-          </a:p>
-          <a:p>
-            <a:r>
-              <a:t>If asked about cost: days; no training data to start; local models make per-message cost roughly zero.</a:t>
+              <a:t>Support, sales leads, HR, incoming documents. Ongoing work is refining the taxonomy as traffic reveals edge cases.</a:t>
             </a:r>
           </a:p>
         </p:txBody>
@@ -3009,12 +3096,7 @@
           <a:lstStyle/>
           <a:p>
             <a:r>
-              <a:t>Support, sales leads, HR, incoming documents. Ongoing work is refining the taxonomy as traffic reveals edge cases. Row 7.</a:t>
-            </a:r>
-          </a:p>
-          <a:p>
-            <a:r>
-              <a:t>If asked about cost: days; no training data to start; local models make per-message cost roughly zero.</a:t>
+              <a:t>The line for your boss. Row 7.</a:t>
             </a:r>
           </a:p>
         </p:txBody>
@@ -3084,12 +3166,7 @@
           <a:lstStyle/>
           <a:p>
             <a:r>
-              <a:t>Support, sales leads, HR, incoming documents. Ongoing work is refining the taxonomy as traffic reveals edge cases. Row 7.</a:t>
-            </a:r>
-          </a:p>
-          <a:p>
-            <a:r>
-              <a:t>If asked about cost: days; no training data to start; local models make per-message cost roughly zero.</a:t>
+              <a:t>Easy. If asked about cost: days; no training data to start; local models make per-message cost roughly zero.</a:t>
             </a:r>
           </a:p>
         </p:txBody>
@@ -3299,12 +3376,7 @@
           <a:lstStyle/>
           <a:p>
             <a:r>
-              <a:t>Barely an AI feature: embeddings plus arithmetic. Every box after the embedding is subtraction and a rule; "bridge washed out" sits farther from the mud cluster than mud reports sit from each other.</a:t>
-            </a:r>
-          </a:p>
-          <a:p>
-            <a:r>
-              <a:t>Say "some AI features are mostly arithmetic wearing an AI badge" while pointing at the last three boxes.</a:t>
+              <a:t>Barely an AI feature: embeddings plus arithmetic. Start with one trail's condition reports.</a:t>
             </a:r>
           </a:p>
         </p:txBody>
@@ -3374,12 +3446,7 @@
           <a:lstStyle/>
           <a:p>
             <a:r>
-              <a:t>Barely an AI feature: embeddings plus arithmetic. Every box after the embedding is subtraction and a rule; "bridge washed out" sits farther from the mud cluster than mud reports sit from each other.</a:t>
-            </a:r>
-          </a:p>
-          <a:p>
-            <a:r>
-              <a:t>Say "some AI features are mostly arithmetic wearing an AI badge" while pointing at the last three boxes.</a:t>
+              <a:t>nomic-embed-text, with the classification: prefix. The prefix is in the model card, and it matters.</a:t>
             </a:r>
           </a:p>
         </p:txBody>
@@ -3449,12 +3516,7 @@
           <a:lstStyle/>
           <a:p>
             <a:r>
-              <a:t>Barely an AI feature: embeddings plus arithmetic. Every box after the embedding is subtraction and a rule; "bridge washed out" sits farther from the mud cluster than mud reports sit from each other.</a:t>
-            </a:r>
-          </a:p>
-          <a:p>
-            <a:r>
-              <a:t>Say "some AI features are mostly arithmetic wearing an AI badge" while pointing at the last three boxes.</a:t>
+              <a:t>Average the vectors. That point is the centroid of "normal."</a:t>
             </a:r>
           </a:p>
         </p:txBody>
@@ -3524,12 +3586,7 @@
           <a:lstStyle/>
           <a:p>
             <a:r>
-              <a:t>Barely an AI feature: embeddings plus arithmetic. Every box after the embedding is subtraction and a rule; "bridge washed out" sits farther from the mud cluster than mud reports sit from each other.</a:t>
-            </a:r>
-          </a:p>
-          <a:p>
-            <a:r>
-              <a:t>Say "some AI features are mostly arithmetic wearing an AI badge" while pointing at the last three boxes.</a:t>
+              <a:t>Measure each new report's distance from it. "Bridge washed out" sits farther from the mud cluster than mud reports sit from each other.</a:t>
             </a:r>
           </a:p>
         </p:txBody>
@@ -3599,12 +3656,7 @@
           <a:lstStyle/>
           <a:p>
             <a:r>
-              <a:t>Barely an AI feature: embeddings plus arithmetic. Every box after the embedding is subtraction and a rule; "bridge washed out" sits farther from the mud cluster than mud reports sit from each other.</a:t>
-            </a:r>
-          </a:p>
-          <a:p>
-            <a:r>
-              <a:t>Say "some AI features are mostly arithmetic wearing an AI badge" while pointing at the last three boxes.</a:t>
+              <a:t>Beyond the threshold, and two or more in fourteen days.</a:t>
             </a:r>
           </a:p>
         </p:txBody>
@@ -3674,12 +3726,7 @@
           <a:lstStyle/>
           <a:p>
             <a:r>
-              <a:t>Barely an AI feature: embeddings plus arithmetic. Every box after the embedding is subtraction and a rule; "bridge washed out" sits farther from the mud cluster than mud reports sit from each other.</a:t>
-            </a:r>
-          </a:p>
-          <a:p>
-            <a:r>
-              <a:t>Say "some AI features are mostly arithmetic wearing an AI badge" while pointing at the last three boxes.</a:t>
+              <a:t>Alert. Every box after the embedding is subtraction and a rule.</a:t>
             </a:r>
           </a:p>
         </p:txBody>
@@ -3749,12 +3796,7 @@
           <a:lstStyle/>
           <a:p>
             <a:r>
-              <a:t>Barely an AI feature: embeddings plus arithmetic. Every box after the embedding is subtraction and a rule; "bridge washed out" sits farther from the mud cluster than mud reports sit from each other.</a:t>
-            </a:r>
-          </a:p>
-          <a:p>
-            <a:r>
-              <a:t>Say "some AI features are mostly arithmetic wearing an AI badge" while pointing at the last three boxes.</a:t>
+              <a:t>The model only makes vectors. It never decides anything.</a:t>
             </a:r>
           </a:p>
         </p:txBody>
@@ -3824,7 +3866,12 @@
           <a:lstStyle/>
           <a:p>
             <a:r>
-              <a:t>One row per advance. Only 07 and 09 ask a model to decide anything; 08 decides with arithmetic. The routing policy in 09 says which decisions a model may make alone. Say which box in each row is the decision.</a:t>
+              <a:t>One row per advance. Say which box in each row is the decision.</a:t>
+            </a:r>
+          </a:p>
+          <a:p>
+            <a:r>
+              <a:t>07 classify: the model picks one label from your list, and the label picks the queue. The decision is the model's.</a:t>
             </a:r>
           </a:p>
         </p:txBody>
@@ -3894,12 +3941,7 @@
           <a:lstStyle/>
           <a:p>
             <a:r>
-              <a:t>Barely an AI feature: embeddings plus arithmetic. Every box after the embedding is subtraction and a rule; "bridge washed out" sits farther from the mud cluster than mud reports sit from each other.</a:t>
-            </a:r>
-          </a:p>
-          <a:p>
-            <a:r>
-              <a:t>Say "some AI features are mostly arithmetic wearing an AI badge" while pointing at the last three boxes.</a:t>
+              <a:t>The alert rule is the feature: one flagged report is noise, two in fourteen days is a washout.</a:t>
             </a:r>
           </a:p>
         </p:txBody>
@@ -3969,12 +4011,7 @@
           <a:lstStyle/>
           <a:p>
             <a:r>
-              <a:t>Barely an AI feature: embeddings plus arithmetic. Every box after the embedding is subtraction and a rule; "bridge washed out" sits farther from the mud cluster than mud reports sit from each other.</a:t>
-            </a:r>
-          </a:p>
-          <a:p>
-            <a:r>
-              <a:t>Say "some AI features are mostly arithmetic wearing an AI badge" while pointing at the last three boxes.</a:t>
+              <a:t>04's code plus one task prefix. Say "some AI features are mostly arithmetic wearing an AI badge" while pointing at the last three boxes.</a:t>
             </a:r>
           </a:p>
         </p:txBody>
@@ -4044,41 +4081,133 @@
           <a:lstStyle/>
           <a:p>
             <a:r>
-              <a:t>Embedding models have usage contracts; reading the model card is engineering work. When 8 of 40 reports describe the same washout they drag the centroid toward themselves; that is why the alert rule beats the ranking, and why the stretch goal builds the centroid from reports before the window. Accuracy here is a property of your corpus, not your code.</a:t>
-            </a:r>
-          </a:p>
-          <a:p>
-            <a:r>
-              <a:t>Demo script (~9 min; step 3 is the first cut — go straight to the prefixed run):</a:t>
-            </a:r>
-          </a:p>
-          <a:p>
-            <a:r>
-              <a:t>1. Scroll the condition-report stream, which is boring on purpose, and ask the room to find the problem. Nobody can, and that is the situation the park is in.</a:t>
-            </a:r>
-          </a:p>
-          <a:p>
-            <a:r>
-              <a:t>2. Embed one trail's reports with the feature 04 embedding code, average the vectors into a centroid, and put the idea on one slide: the center of normal.</a:t>
-            </a:r>
-          </a:p>
-          <a:p>
-            <a:r>
-              <a:t>3. Run it with </a:t>
+              <a:t>~9 min · Terminal 2 · </a:t>
             </a:r>
             <a:r>
               <a:rPr>
                 <a:latin typeface="Consolas"/>
               </a:rPr>
-              <a:t>dotnet run -- --raw</a:t>
-            </a:r>
-            <a:r>
-              <a:t> first and print every report's distance, sorted. It underwhelms, because the washout reports scatter through the middle of the list, and it is worth sitting in that for a second, since this is what the technique actually does out of the box.</a:t>
-            </a:r>
-          </a:p>
-          <a:p>
-            <a:r>
-              <a:t>4. Add the model's task prefix (</a:t>
+              <a:t>cd modules/M3-deciding/F08-anomaly-detection/dotnet</a:t>
+            </a:r>
+          </a:p>
+          <a:p>
+            <a:r>
+              <a:t>Files: </a:t>
+            </a:r>
+            <a:r>
+              <a:rPr>
+                <a:latin typeface="Consolas"/>
+              </a:rPr>
+              <a:t>reports-0117.jsonl</a:t>
+            </a:r>
+            <a:r>
+              <a:t> = 40 reports, the washout trail · </a:t>
+            </a:r>
+            <a:r>
+              <a:rPr>
+                <a:latin typeface="Consolas"/>
+              </a:rPr>
+              <a:t>reports-0042.jsonl</a:t>
+            </a:r>
+            <a:r>
+              <a:t> = 25 reports, the bear trail · </a:t>
+            </a:r>
+            <a:r>
+              <a:rPr>
+                <a:latin typeface="Consolas"/>
+              </a:rPr>
+              <a:t>embeddings-0117.json</a:t>
+            </a:r>
+            <a:r>
+              <a:t> = precomputed vectors, the starter runs offline on them</a:t>
+            </a:r>
+          </a:p>
+          <a:p>
+            <a:r>
+              <a:t>Flags: </a:t>
+            </a:r>
+            <a:r>
+              <a:rPr>
+                <a:latin typeface="Consolas"/>
+              </a:rPr>
+              <a:t>--raw</a:t>
+            </a:r>
+            <a:r>
+              <a:t> = no task prefix · </a:t>
+            </a:r>
+            <a:r>
+              <a:rPr>
+                <a:latin typeface="Consolas"/>
+              </a:rPr>
+              <a:t>--trail 0042</a:t>
+            </a:r>
+            <a:r>
+              <a:t> = the other trail · </a:t>
+            </a:r>
+            <a:r>
+              <a:rPr>
+                <a:latin typeface="Consolas"/>
+              </a:rPr>
+              <a:t>--sigma</a:t>
+            </a:r>
+            <a:r>
+              <a:t> = threshold (default mean + 1 sd) · </a:t>
+            </a:r>
+            <a:r>
+              <a:rPr>
+                <a:latin typeface="Consolas"/>
+              </a:rPr>
+              <a:t>--window</a:t>
+            </a:r>
+            <a:r>
+              <a:t> = days (default 14)</a:t>
+            </a:r>
+          </a:p>
+          <a:p>
+            <a:r>
+              <a:t>1. Open </a:t>
+            </a:r>
+            <a:r>
+              <a:rPr>
+                <a:latin typeface="Consolas"/>
+              </a:rPr>
+              <a:t>data/reports-0117.jsonl</a:t>
+            </a:r>
+            <a:r>
+              <a:t>, scroll. Boring on purpose. Find the problem. Nobody can.</a:t>
+            </a:r>
+          </a:p>
+          <a:p>
+            <a:r>
+              <a:t>2. Centroid: average the vectors, the center of normal.</a:t>
+            </a:r>
+          </a:p>
+          <a:p>
+            <a:r>
+              <a:t>3. Before: </a:t>
+            </a:r>
+            <a:r>
+              <a:rPr>
+                <a:latin typeface="Consolas"/>
+              </a:rPr>
+              <a:t>cd complete &amp;&amp; dotnet run -- --raw</a:t>
+            </a:r>
+            <a:r>
+              <a:t>. Washouts lost mid-list.</a:t>
+            </a:r>
+          </a:p>
+          <a:p>
+            <a:r>
+              <a:t>4. After: </a:t>
+            </a:r>
+            <a:r>
+              <a:rPr>
+                <a:latin typeface="Consolas"/>
+              </a:rPr>
+              <a:t>dotnet run</a:t>
+            </a:r>
+            <a:r>
+              <a:t>. </a:t>
             </a:r>
             <a:r>
               <a:rPr>
@@ -4087,26 +4216,36 @@
               <a:t>classification:</a:t>
             </a:r>
             <a:r>
-              <a:t>) and re-run with plain </a:t>
+              <a:t> prefix. A washout jumps to rank 2. Read the model card.</a:t>
+            </a:r>
+          </a:p>
+          <a:p>
+            <a:r>
+              <a:t>5. Same output, the alert block: 1 alert, 3 real reports, 0 false.</a:t>
+            </a:r>
+          </a:p>
+          <a:p>
+            <a:r>
+              <a:t>6. </a:t>
             </a:r>
             <a:r>
               <a:rPr>
                 <a:latin typeface="Consolas"/>
               </a:rPr>
-              <a:t>dotnet run</a:t>
-            </a:r>
-            <a:r>
-              <a:t>. A washout report jumps to rank 2 and the mud reports settle at the bottom. The lesson: embedding models have usage contracts, and reading the model card is engineering work, not homework.</a:t>
-            </a:r>
-          </a:p>
-          <a:p>
-            <a:r>
-              <a:t>5. Now the alert rule, which is where the feature actually lives: distance beyond threshold, plus two or more flagged reports within a two-week window. One alert fires on this trail, three genuine washout reports in it, nothing false. Show it also catching the bear-activity spike on the other trail, where the signal is even cleaner because that trail's routine chatter is more uniform. Accuracy here is a property of your corpus, not your code.</a:t>
-            </a:r>
-          </a:p>
-          <a:p>
-            <a:r>
-              <a:t>6. Count the model calls: embeddings only, and everything after them was subtraction. Some AI features are mostly arithmetic wearing an AI badge.</a:t>
+              <a:t>dotnet run -- --trail 0042</a:t>
+            </a:r>
+            <a:r>
+              <a:t>: the bear spike, cleaner still.</a:t>
+            </a:r>
+          </a:p>
+          <a:p>
+            <a:r>
+              <a:t>7. Model calls: embeddings only. The rest was subtraction.</a:t>
+            </a:r>
+          </a:p>
+          <a:p>
+            <a:r>
+              <a:t>Cut: 3, go straight to 4.</a:t>
             </a:r>
           </a:p>
         </p:txBody>
@@ -4176,17 +4315,7 @@
           <a:lstStyle/>
           <a:p>
             <a:r>
-              <a:t>Tickets, logs, safety reports, transaction notes, review streams.</a:t>
-            </a:r>
-          </a:p>
-          <a:p>
-            <a:r>
-              <a:t>Pairs with 07: classification handles the categories you knew to define; anomaly detection catches the things you didn't. Row 8.</a:t>
-            </a:r>
-          </a:p>
-          <a:p>
-            <a:r>
-              <a:t>If asked about cost: days to build, cheap to run forever; embeddings are the only model cost.</a:t>
+              <a:t>Tickets, logs, safety reports, transaction notes, review streams. Pairs with 07: classification handles the categories you knew to define; anomaly detection catches the things you didn't.</a:t>
             </a:r>
           </a:p>
         </p:txBody>
@@ -4256,17 +4385,7 @@
           <a:lstStyle/>
           <a:p>
             <a:r>
-              <a:t>Tickets, logs, safety reports, transaction notes, review streams.</a:t>
-            </a:r>
-          </a:p>
-          <a:p>
-            <a:r>
-              <a:t>Pairs with 07: classification handles the categories you knew to define; anomaly detection catches the things you didn't. Row 8.</a:t>
-            </a:r>
-          </a:p>
-          <a:p>
-            <a:r>
-              <a:t>If asked about cost: days to build, cheap to run forever; embeddings are the only model cost.</a:t>
+              <a:t>The line for your boss. Row 8.</a:t>
             </a:r>
           </a:p>
         </p:txBody>
@@ -4336,17 +4455,7 @@
           <a:lstStyle/>
           <a:p>
             <a:r>
-              <a:t>Tickets, logs, safety reports, transaction notes, review streams.</a:t>
-            </a:r>
-          </a:p>
-          <a:p>
-            <a:r>
-              <a:t>Pairs with 07: classification handles the categories you knew to define; anomaly detection catches the things you didn't. Row 8.</a:t>
-            </a:r>
-          </a:p>
-          <a:p>
-            <a:r>
-              <a:t>If asked about cost: days to build, cheap to run forever; embeddings are the only model cost.</a:t>
+              <a:t>Medium. If asked about cost: days to build, cheap to run forever; embeddings are the only model cost.</a:t>
             </a:r>
           </a:p>
         </p:txBody>
@@ -4561,7 +4670,7 @@
           <a:lstStyle/>
           <a:p>
             <a:r>
-              <a:t>A product pattern, not a model feature — the difference between AI features that ship and ones killed in legal review. Three lanes by error cost and reversibility: auto-send, draft-for-approval, human-only. The emergency row of the policy table skips the whole diagram; that is the design, not a limitation.</a:t>
+              <a:t>A product pattern, not a model feature: the difference between AI features that ship and ones killed in legal review. It starts with a routed inquiry from 07.</a:t>
             </a:r>
           </a:p>
         </p:txBody>
@@ -4631,7 +4740,7 @@
           <a:lstStyle/>
           <a:p>
             <a:r>
-              <a:t>A product pattern, not a model feature — the difference between AI features that ship and ones killed in legal review. Three lanes by error cost and reversibility: auto-send, draft-for-approval, human-only. The emergency row of the policy table skips the whole diagram; that is the design, not a limitation.</a:t>
+              <a:t>Retrieve the park docs, the way 05 did.</a:t>
             </a:r>
           </a:p>
         </p:txBody>
@@ -4701,12 +4810,7 @@
           <a:lstStyle/>
           <a:p>
             <a:r>
-              <a:t>The user is usually a colleague; the rhythm again: three demos, then your lab hour.</a:t>
-            </a:r>
-          </a:p>
-          <a:p>
-            <a:r>
-              <a:t>Which queue does this go in, which of these 500 reports deserves attention, what is the software allowed to send without a human reading it first.</a:t>
+              <a:t>09: what is the software allowed to send without a human reading it first.</a:t>
             </a:r>
           </a:p>
           <a:p>
@@ -4720,7 +4824,7 @@
               <a:t>unsure</a:t>
             </a:r>
             <a:r>
-              <a:t> lane to a person, and remember: a prompt instruction is a request, a policy lane is a guarantee. Feature 09 makes the sharpest version of that by failing, live, every time — set it up now.</a:t>
+              <a:t> lane to a person, and remember: a prompt instruction is a request, a policy lane is a guarantee. Feature 09 makes the sharpest version of that by failing, live, every time. Set it up now.</a:t>
             </a:r>
           </a:p>
         </p:txBody>
@@ -4790,7 +4894,7 @@
           <a:lstStyle/>
           <a:p>
             <a:r>
-              <a:t>A product pattern, not a model feature — the difference between AI features that ship and ones killed in legal review. Three lanes by error cost and reversibility: auto-send, draft-for-approval, human-only. The emergency row of the policy table skips the whole diagram; that is the design, not a limitation.</a:t>
+              <a:t>The model drafts a reply.</a:t>
             </a:r>
           </a:p>
         </p:txBody>
@@ -4860,7 +4964,7 @@
           <a:lstStyle/>
           <a:p>
             <a:r>
-              <a:t>A product pattern, not a model feature — the difference between AI features that ship and ones killed in legal review. Three lanes by error cost and reversibility: auto-send, draft-for-approval, human-only. The emergency row of the policy table skips the whole diagram; that is the design, not a limitation.</a:t>
+              <a:t>A human approves, edits, or rejects. This box is the feature.</a:t>
             </a:r>
           </a:p>
         </p:txBody>
@@ -4930,7 +5034,7 @@
           <a:lstStyle/>
           <a:p>
             <a:r>
-              <a:t>A product pattern, not a model feature — the difference between AI features that ship and ones killed in legal review. Three lanes by error cost and reversibility: auto-send, draft-for-approval, human-only. The emergency row of the policy table skips the whole diagram; that is the design, not a limitation.</a:t>
+              <a:t>Send, and log the draft, the decision, and the final text.</a:t>
             </a:r>
           </a:p>
         </p:txBody>
@@ -5000,7 +5104,7 @@
           <a:lstStyle/>
           <a:p>
             <a:r>
-              <a:t>A product pattern, not a model feature — the difference between AI features that ship and ones killed in legal review. Three lanes by error cost and reversibility: auto-send, draft-for-approval, human-only. The emergency row of the policy table skips the whole diagram; that is the design, not a limitation.</a:t>
+              <a:t>The model types, a person decides, the log proves it.</a:t>
             </a:r>
           </a:p>
         </p:txBody>
@@ -5070,7 +5174,7 @@
           <a:lstStyle/>
           <a:p>
             <a:r>
-              <a:t>A product pattern, not a model feature — the difference between AI features that ship and ones killed in legal review. Three lanes by error cost and reversibility: auto-send, draft-for-approval, human-only. The emergency row of the policy table skips the whole diagram; that is the design, not a limitation.</a:t>
+              <a:t>A policy table sits in front of this line. Three lanes by error cost and reversibility: auto-send, draft-for-approval, human-only. The emergency row skips the whole diagram; that is the design, not a limitation.</a:t>
             </a:r>
           </a:p>
         </p:txBody>
@@ -5140,7 +5244,7 @@
           <a:lstStyle/>
           <a:p>
             <a:r>
-              <a:t>A product pattern, not a model feature — the difference between AI features that ship and ones killed in legal review. Three lanes by error cost and reversibility: auto-send, draft-for-approval, human-only. The emergency row of the policy table skips the whole diagram; that is the design, not a limitation.</a:t>
+              <a:t>Today's edits are tomorrow's prompt. The human is the feedback signal as much as the safety check.</a:t>
             </a:r>
           </a:p>
         </p:txBody>
@@ -5210,61 +5314,134 @@
           <a:lstStyle/>
           <a:p>
             <a:r>
-              <a:t>The raw-prompt failure runs 3/3 both ways; reference runs are in </a:t>
+              <a:t>~9 min · Terminal 2 · </a:t>
             </a:r>
             <a:r>
               <a:rPr>
                 <a:latin typeface="Consolas"/>
               </a:rPr>
-              <a:t>expected-output.md</a:t>
-            </a:r>
-            <a:r>
-              <a:t> if you skip showing it live. The edits collected live are tomorrow's prompt improvements; the human is the feedback signal as much as the safety check.</a:t>
-            </a:r>
-          </a:p>
-          <a:p>
-            <a:r>
-              <a:t>Keep the emergency row on screen for a beat: no AI touches it, by policy.</a:t>
-            </a:r>
-          </a:p>
-          <a:p>
-            <a:r>
-              <a:t>Demo script (~9 min; step 4 is the first cut):</a:t>
-            </a:r>
-          </a:p>
-          <a:p>
-            <a:r>
-              <a:t>0. If time allows, open with the raw-prompt escalation failure live: the overdue-husband inquiry straight into the drafting prompt, the warm useless note out. Then the version with the instruction on top: ESCALATE announced, note written anyway. That is the case for everything that follows.</a:t>
-            </a:r>
-          </a:p>
-          <a:p>
-            <a:r>
-              <a:t>1. Pick up where feature 07 left off: a routed queue of condition questions awaiting replies.</a:t>
-            </a:r>
-          </a:p>
-          <a:p>
-            <a:r>
-              <a:t>2. Generate a draft reply for one inquiry, grounded in the park docs the same way feature 05 grounded answers. Show the draft on screen; it is good without being perfect.</a:t>
-            </a:r>
-          </a:p>
-          <a:p>
-            <a:r>
-              <a:t>3. Run the approval flow in a small console UI: approve one draft untouched, edit a second before sending, reject a third and write it by hand. Three inquiries handled in the time one used to take.</a:t>
-            </a:r>
-          </a:p>
-          <a:p>
-            <a:r>
-              <a:t>4. Show the audit log the flow just produced: draft, decision, final text, edit distance per reply.</a:t>
-            </a:r>
-          </a:p>
-          <a:p>
-            <a:r>
-              <a:t>5. Put the routing policy on screen as a table: which categories auto-send, which get drafts, which stay human-only. Point at the emergency row: no AI draft, ever, by policy.</a:t>
-            </a:r>
-          </a:p>
-          <a:p>
-            <a:r>
-              <a:t>6. Close the loop: the edits collected in step 3 are tomorrow's prompt improvements. The human is the feedback signal as much as the safety check.</a:t>
+              <a:t>cd modules/M3-deciding/F09-human-in-the-loop/dotnet</a:t>
+            </a:r>
+          </a:p>
+          <a:p>
+            <a:r>
+              <a:t>Files: </a:t>
+            </a:r>
+            <a:r>
+              <a:rPr>
+                <a:latin typeface="Consolas"/>
+              </a:rPr>
+              <a:t>inquiries.jsonl</a:t>
+            </a:r>
+            <a:r>
+              <a:t> = a queue of 6, one is the overdue-husband emergency · </a:t>
+            </a:r>
+            <a:r>
+              <a:rPr>
+                <a:latin typeface="Consolas"/>
+              </a:rPr>
+              <a:t>outbox/</a:t>
+            </a:r>
+            <a:r>
+              <a:t> = what got sent · </a:t>
+            </a:r>
+            <a:r>
+              <a:rPr>
+                <a:latin typeface="Consolas"/>
+              </a:rPr>
+              <a:t>decisions.jsonl</a:t>
+            </a:r>
+            <a:r>
+              <a:t> = the audit log</a:t>
+            </a:r>
+          </a:p>
+          <a:p>
+            <a:r>
+              <a:t>Flags: </a:t>
+            </a:r>
+            <a:r>
+              <a:rPr>
+                <a:latin typeface="Consolas"/>
+              </a:rPr>
+              <a:t>--policy</a:t>
+            </a:r>
+            <a:r>
+              <a:t> = print the routing table and exit · </a:t>
+            </a:r>
+            <a:r>
+              <a:rPr>
+                <a:latin typeface="Consolas"/>
+              </a:rPr>
+              <a:t>--auto-approve-dry-run</a:t>
+            </a:r>
+            <a:r>
+              <a:t> = non-interactive, testing only</a:t>
+            </a:r>
+          </a:p>
+          <a:p>
+            <a:r>
+              <a:t>1. Before: </a:t>
+            </a:r>
+            <a:r>
+              <a:rPr>
+                <a:latin typeface="Consolas"/>
+              </a:rPr>
+              <a:t>cd starter &amp;&amp; dotnet run</a:t>
+            </a:r>
+            <a:r>
+              <a:t>. Six drafts, all sent, none reviewed. The emergency gets a warm, useless note. Every time.</a:t>
+            </a:r>
+          </a:p>
+          <a:p>
+            <a:r>
+              <a:t>2. After: </a:t>
+            </a:r>
+            <a:r>
+              <a:rPr>
+                <a:latin typeface="Consolas"/>
+              </a:rPr>
+              <a:t>cd ../complete &amp;&amp; dotnet run</a:t>
+            </a:r>
+            <a:r>
+              <a:t>. The queue, one at a time. Approve one. Edit one. Reject one and write it.</a:t>
+            </a:r>
+          </a:p>
+          <a:p>
+            <a:r>
+              <a:t>3. Open </a:t>
+            </a:r>
+            <a:r>
+              <a:rPr>
+                <a:latin typeface="Consolas"/>
+              </a:rPr>
+              <a:t>decisions.jsonl</a:t>
+            </a:r>
+            <a:r>
+              <a:t>: draft, decision, final text, edit distance.</a:t>
+            </a:r>
+          </a:p>
+          <a:p>
+            <a:r>
+              <a:t>4. </a:t>
+            </a:r>
+            <a:r>
+              <a:rPr>
+                <a:latin typeface="Consolas"/>
+              </a:rPr>
+              <a:t>dotnet run -- --policy</a:t>
+            </a:r>
+            <a:r>
+              <a:t>: the table. Point at the emergency row. No AI, by policy.</a:t>
+            </a:r>
+          </a:p>
+          <a:p>
+            <a:r>
+              <a:t>5. The edits are tomorrow's prompt.</a:t>
+            </a:r>
+          </a:p>
+          <a:p>
+            <a:r>
+              <a:t>Cut: 3.</a:t>
             </a:r>
           </a:p>
         </p:txBody>
@@ -5334,12 +5511,7 @@
           <a:lstStyle/>
           <a:p>
             <a:r>
-              <a:t>Support replies, quotes, claims decisions. Often what makes the other nine shippable. Row 9.</a:t>
-            </a:r>
-          </a:p>
-          <a:p>
-            <a:r>
-              <a:t>If asked about cost: drafting is trivial; the approval UI, audit trail, and policy design are ordinary product engineering, measured in weeks.</a:t>
+              <a:t>Support replies, quotes, claims decisions. Often what makes the other nine shippable.</a:t>
             </a:r>
           </a:p>
         </p:txBody>
@@ -5409,12 +5581,7 @@
           <a:lstStyle/>
           <a:p>
             <a:r>
-              <a:t>Support replies, quotes, claims decisions. Often what makes the other nine shippable. Row 9.</a:t>
-            </a:r>
-          </a:p>
-          <a:p>
-            <a:r>
-              <a:t>If asked about cost: drafting is trivial; the approval UI, audit trail, and policy design are ordinary product engineering, measured in weeks.</a:t>
+              <a:t>The line for your boss. Row 9.</a:t>
             </a:r>
           </a:p>
         </p:txBody>
@@ -5484,12 +5651,7 @@
           <a:lstStyle/>
           <a:p>
             <a:r>
-              <a:t>Support replies, quotes, claims decisions. Often what makes the other nine shippable. Row 9.</a:t>
-            </a:r>
-          </a:p>
-          <a:p>
-            <a:r>
-              <a:t>If asked about cost: drafting is trivial; the approval UI, audit trail, and policy design are ordinary product engineering, measured in weeks.</a:t>
+              <a:t>Medium. If asked about cost: drafting is trivial; the approval UI, audit trail, and policy design are ordinary product engineering, measured in weeks.</a:t>
             </a:r>
           </a:p>
         </p:txBody>
@@ -5784,21 +5946,7 @@
           </a:p>
           <a:p>
             <a:r>
-              <a:t>Which queue does this go in, which of these 500 reports deserves attention, what is the software allowed to send without a human reading it first.</a:t>
-            </a:r>
-          </a:p>
-          <a:p>
-            <a:r>
-              <a:t>The thread to watch: errors are not symmetric. A misrouted complaint costs somebody a day; a misrouted emergency is a headline. Measure recall on the class that matters, give ambiguity an </a:t>
-            </a:r>
-            <a:r>
-              <a:rPr>
-                <a:latin typeface="Consolas"/>
-              </a:rPr>
-              <a:t>unsure</a:t>
-            </a:r>
-            <a:r>
-              <a:t> lane to a person, and remember: a prompt instruction is a request, a policy lane is a guarantee. Feature 09 makes the sharpest version of that by failing, live, every time — set it up now.</a:t>
+              <a:t>07: which queue does this message go in.</a:t>
             </a:r>
           </a:p>
         </p:txBody>
@@ -5868,26 +6016,7 @@
           <a:lstStyle/>
           <a:p>
             <a:r>
-              <a:t>The user is usually a colleague; the rhythm again: three demos, then your lab hour.</a:t>
-            </a:r>
-          </a:p>
-          <a:p>
-            <a:r>
-              <a:t>Which queue does this go in, which of these 500 reports deserves attention, what is the software allowed to send without a human reading it first.</a:t>
-            </a:r>
-          </a:p>
-          <a:p>
-            <a:r>
-              <a:t>The thread to watch: errors are not symmetric. A misrouted complaint costs somebody a day; a misrouted emergency is a headline. Measure recall on the class that matters, give ambiguity an </a:t>
-            </a:r>
-            <a:r>
-              <a:rPr>
-                <a:latin typeface="Consolas"/>
-              </a:rPr>
-              <a:t>unsure</a:t>
-            </a:r>
-            <a:r>
-              <a:t> lane to a person, and remember: a prompt instruction is a request, a policy lane is a guarantee. Feature 09 makes the sharpest version of that by failing, live, every time — set it up now.</a:t>
+              <a:t>08: which of these 500 reports deserves attention.</a:t>
             </a:r>
           </a:p>
         </p:txBody>

--- a/docs/slides/pptx/M3-deciding.pptx
+++ b/docs/slides/pptx/M3-deciding.pptx
@@ -2815,7 +2815,7 @@
           <a:lstStyle/>
           <a:p>
             <a:r>
-              <a:t>~8 min · Terminal 2 · </a:t>
+              <a:t>~8 min · </a:t>
             </a:r>
             <a:r>
               <a:rPr>
@@ -4081,7 +4081,7 @@
           <a:lstStyle/>
           <a:p>
             <a:r>
-              <a:t>~9 min · Terminal 2 · </a:t>
+              <a:t>~9 min · </a:t>
             </a:r>
             <a:r>
               <a:rPr>
@@ -5314,7 +5314,7 @@
           <a:lstStyle/>
           <a:p>
             <a:r>
-              <a:t>~9 min · Terminal 2 · </a:t>
+              <a:t>~9 min · </a:t>
             </a:r>
             <a:r>
               <a:rPr>
